--- a/Learn/架构.pptx
+++ b/Learn/架构.pptx
@@ -1,11 +1,12 @@
 
 <file path=ppt/presentation.xml><?xml version="1.0" encoding="utf-8"?>
-<p:presentation xmlns:a="http://schemas.openxmlformats.org/drawingml/2006/main" xmlns:r="http://schemas.openxmlformats.org/officeDocument/2006/relationships" xmlns:p="http://schemas.openxmlformats.org/presentationml/2006/main" saveSubsetFonts="1">
+<p:presentation xmlns:a="http://schemas.openxmlformats.org/drawingml/2006/main" xmlns:r="http://schemas.openxmlformats.org/officeDocument/2006/relationships" xmlns:p="http://schemas.openxmlformats.org/presentationml/2006/main">
   <p:sldMasterIdLst>
     <p:sldMasterId id="2147483648" r:id="rId1"/>
   </p:sldMasterIdLst>
   <p:sldIdLst>
-    <p:sldId id="256" r:id="rId2"/>
+    <p:sldId id="256" r:id="rId3"/>
+    <p:sldId id="257" r:id="rId4"/>
   </p:sldIdLst>
   <p:sldSz cx="12192000" cy="6858000"/>
   <p:notesSz cx="6858000" cy="9144000"/>
@@ -126,13 +127,7 @@
       </p:grpSpPr>
       <p:sp>
         <p:nvSpPr>
-          <p:cNvPr id="2" name="标题 1">
-            <a:extLst>
-              <a:ext uri="{FF2B5EF4-FFF2-40B4-BE49-F238E27FC236}">
-                <a16:creationId xmlns:a16="http://schemas.microsoft.com/office/drawing/2014/main" id="{66E43B5A-8612-3540-7C97-B22C0E5F2C90}"/>
-              </a:ext>
-            </a:extLst>
-          </p:cNvPr>
+          <p:cNvPr id="2" name="标题 1"/>
           <p:cNvSpPr>
             <a:spLocks noGrp="1"/>
           </p:cNvSpPr>
@@ -158,18 +153,13 @@
               <a:rPr lang="zh-CN" altLang="en-US"/>
               <a:t>单击此处编辑母版标题样式</a:t>
             </a:r>
-          </a:p>
-        </p:txBody>
-      </p:sp>
-      <p:sp>
-        <p:nvSpPr>
-          <p:cNvPr id="3" name="副标题 2">
-            <a:extLst>
-              <a:ext uri="{FF2B5EF4-FFF2-40B4-BE49-F238E27FC236}">
-                <a16:creationId xmlns:a16="http://schemas.microsoft.com/office/drawing/2014/main" id="{ECF12D1A-3AB9-4A72-1571-B9CF99D378BB}"/>
-              </a:ext>
-            </a:extLst>
-          </p:cNvPr>
+            <a:endParaRPr lang="zh-CN" altLang="en-US"/>
+          </a:p>
+        </p:txBody>
+      </p:sp>
+      <p:sp>
+        <p:nvSpPr>
+          <p:cNvPr id="3" name="副标题 2"/>
           <p:cNvSpPr>
             <a:spLocks noGrp="1"/>
           </p:cNvSpPr>
@@ -228,18 +218,13 @@
               <a:rPr lang="zh-CN" altLang="en-US"/>
               <a:t>单击此处编辑母版副标题样式</a:t>
             </a:r>
-          </a:p>
-        </p:txBody>
-      </p:sp>
-      <p:sp>
-        <p:nvSpPr>
-          <p:cNvPr id="4" name="日期占位符 3">
-            <a:extLst>
-              <a:ext uri="{FF2B5EF4-FFF2-40B4-BE49-F238E27FC236}">
-                <a16:creationId xmlns:a16="http://schemas.microsoft.com/office/drawing/2014/main" id="{DAC0BA51-4B9F-FCC3-3343-E2EE108267D8}"/>
-              </a:ext>
-            </a:extLst>
-          </p:cNvPr>
+            <a:endParaRPr lang="zh-CN" altLang="en-US"/>
+          </a:p>
+        </p:txBody>
+      </p:sp>
+      <p:sp>
+        <p:nvSpPr>
+          <p:cNvPr id="4" name="日期占位符 3"/>
           <p:cNvSpPr>
             <a:spLocks noGrp="1"/>
           </p:cNvSpPr>
@@ -254,7 +239,6 @@
           <a:p>
             <a:fld id="{48B9BF90-9AD0-4816-8801-3F9FE764476F}" type="datetimeFigureOut">
               <a:rPr lang="zh-CN" altLang="en-US" smtClean="0"/>
-              <a:t>2025/9/14</a:t>
             </a:fld>
             <a:endParaRPr lang="zh-CN" altLang="en-US"/>
           </a:p>
@@ -262,13 +246,7 @@
       </p:sp>
       <p:sp>
         <p:nvSpPr>
-          <p:cNvPr id="5" name="页脚占位符 4">
-            <a:extLst>
-              <a:ext uri="{FF2B5EF4-FFF2-40B4-BE49-F238E27FC236}">
-                <a16:creationId xmlns:a16="http://schemas.microsoft.com/office/drawing/2014/main" id="{FF91CCBC-87A8-D2F6-CD7E-1DA9DD6BDA6B}"/>
-              </a:ext>
-            </a:extLst>
-          </p:cNvPr>
+          <p:cNvPr id="5" name="页脚占位符 4"/>
           <p:cNvSpPr>
             <a:spLocks noGrp="1"/>
           </p:cNvSpPr>
@@ -287,13 +265,7 @@
       </p:sp>
       <p:sp>
         <p:nvSpPr>
-          <p:cNvPr id="6" name="灯片编号占位符 5">
-            <a:extLst>
-              <a:ext uri="{FF2B5EF4-FFF2-40B4-BE49-F238E27FC236}">
-                <a16:creationId xmlns:a16="http://schemas.microsoft.com/office/drawing/2014/main" id="{FC957009-B855-E339-4B91-B83562CF75CA}"/>
-              </a:ext>
-            </a:extLst>
-          </p:cNvPr>
+          <p:cNvPr id="6" name="灯片编号占位符 5"/>
           <p:cNvSpPr>
             <a:spLocks noGrp="1"/>
           </p:cNvSpPr>
@@ -308,18 +280,12 @@
           <a:p>
             <a:fld id="{237910C0-D9AB-4262-801A-4937D3790620}" type="slidenum">
               <a:rPr lang="zh-CN" altLang="en-US" smtClean="0"/>
-              <a:t>‹#›</a:t>
             </a:fld>
             <a:endParaRPr lang="zh-CN" altLang="en-US"/>
           </a:p>
         </p:txBody>
       </p:sp>
     </p:spTree>
-    <p:extLst>
-      <p:ext uri="{BB962C8B-B14F-4D97-AF65-F5344CB8AC3E}">
-        <p14:creationId xmlns:p14="http://schemas.microsoft.com/office/powerpoint/2010/main" val="2765713066"/>
-      </p:ext>
-    </p:extLst>
   </p:cSld>
   <p:clrMapOvr>
     <a:masterClrMapping/>
@@ -346,13 +312,7 @@
       </p:grpSpPr>
       <p:sp>
         <p:nvSpPr>
-          <p:cNvPr id="2" name="标题 1">
-            <a:extLst>
-              <a:ext uri="{FF2B5EF4-FFF2-40B4-BE49-F238E27FC236}">
-                <a16:creationId xmlns:a16="http://schemas.microsoft.com/office/drawing/2014/main" id="{05B8C0AC-FEA7-C827-F291-54E4B55432BB}"/>
-              </a:ext>
-            </a:extLst>
-          </p:cNvPr>
+          <p:cNvPr id="2" name="标题 1"/>
           <p:cNvSpPr>
             <a:spLocks noGrp="1"/>
           </p:cNvSpPr>
@@ -369,18 +329,13 @@
               <a:rPr lang="zh-CN" altLang="en-US"/>
               <a:t>单击此处编辑母版标题样式</a:t>
             </a:r>
-          </a:p>
-        </p:txBody>
-      </p:sp>
-      <p:sp>
-        <p:nvSpPr>
-          <p:cNvPr id="3" name="竖排文字占位符 2">
-            <a:extLst>
-              <a:ext uri="{FF2B5EF4-FFF2-40B4-BE49-F238E27FC236}">
-                <a16:creationId xmlns:a16="http://schemas.microsoft.com/office/drawing/2014/main" id="{A3C7470F-3836-E5B2-295D-B40BC9EED70A}"/>
-              </a:ext>
-            </a:extLst>
-          </p:cNvPr>
+            <a:endParaRPr lang="zh-CN" altLang="en-US"/>
+          </a:p>
+        </p:txBody>
+      </p:sp>
+      <p:sp>
+        <p:nvSpPr>
+          <p:cNvPr id="3" name="竖排文字占位符 2"/>
           <p:cNvSpPr>
             <a:spLocks noGrp="1"/>
           </p:cNvSpPr>
@@ -398,6 +353,7 @@
               <a:rPr lang="zh-CN" altLang="en-US"/>
               <a:t>单击此处编辑母版文本样式</a:t>
             </a:r>
+            <a:endParaRPr lang="zh-CN" altLang="en-US"/>
           </a:p>
           <a:p>
             <a:pPr lvl="1"/>
@@ -405,6 +361,7 @@
               <a:rPr lang="zh-CN" altLang="en-US"/>
               <a:t>二级</a:t>
             </a:r>
+            <a:endParaRPr lang="zh-CN" altLang="en-US"/>
           </a:p>
           <a:p>
             <a:pPr lvl="2"/>
@@ -412,6 +369,7 @@
               <a:rPr lang="zh-CN" altLang="en-US"/>
               <a:t>三级</a:t>
             </a:r>
+            <a:endParaRPr lang="zh-CN" altLang="en-US"/>
           </a:p>
           <a:p>
             <a:pPr lvl="3"/>
@@ -419,6 +377,7 @@
               <a:rPr lang="zh-CN" altLang="en-US"/>
               <a:t>四级</a:t>
             </a:r>
+            <a:endParaRPr lang="zh-CN" altLang="en-US"/>
           </a:p>
           <a:p>
             <a:pPr lvl="4"/>
@@ -426,18 +385,13 @@
               <a:rPr lang="zh-CN" altLang="en-US"/>
               <a:t>五级</a:t>
             </a:r>
-          </a:p>
-        </p:txBody>
-      </p:sp>
-      <p:sp>
-        <p:nvSpPr>
-          <p:cNvPr id="4" name="日期占位符 3">
-            <a:extLst>
-              <a:ext uri="{FF2B5EF4-FFF2-40B4-BE49-F238E27FC236}">
-                <a16:creationId xmlns:a16="http://schemas.microsoft.com/office/drawing/2014/main" id="{78B7E3A3-EFE4-EE4A-61AF-DD3871DB1CB4}"/>
-              </a:ext>
-            </a:extLst>
-          </p:cNvPr>
+            <a:endParaRPr lang="zh-CN" altLang="en-US"/>
+          </a:p>
+        </p:txBody>
+      </p:sp>
+      <p:sp>
+        <p:nvSpPr>
+          <p:cNvPr id="4" name="日期占位符 3"/>
           <p:cNvSpPr>
             <a:spLocks noGrp="1"/>
           </p:cNvSpPr>
@@ -452,7 +406,6 @@
           <a:p>
             <a:fld id="{48B9BF90-9AD0-4816-8801-3F9FE764476F}" type="datetimeFigureOut">
               <a:rPr lang="zh-CN" altLang="en-US" smtClean="0"/>
-              <a:t>2025/9/14</a:t>
             </a:fld>
             <a:endParaRPr lang="zh-CN" altLang="en-US"/>
           </a:p>
@@ -460,13 +413,7 @@
       </p:sp>
       <p:sp>
         <p:nvSpPr>
-          <p:cNvPr id="5" name="页脚占位符 4">
-            <a:extLst>
-              <a:ext uri="{FF2B5EF4-FFF2-40B4-BE49-F238E27FC236}">
-                <a16:creationId xmlns:a16="http://schemas.microsoft.com/office/drawing/2014/main" id="{88B0E983-D170-C7EC-658E-B0BE4AFF8F8D}"/>
-              </a:ext>
-            </a:extLst>
-          </p:cNvPr>
+          <p:cNvPr id="5" name="页脚占位符 4"/>
           <p:cNvSpPr>
             <a:spLocks noGrp="1"/>
           </p:cNvSpPr>
@@ -485,13 +432,7 @@
       </p:sp>
       <p:sp>
         <p:nvSpPr>
-          <p:cNvPr id="6" name="灯片编号占位符 5">
-            <a:extLst>
-              <a:ext uri="{FF2B5EF4-FFF2-40B4-BE49-F238E27FC236}">
-                <a16:creationId xmlns:a16="http://schemas.microsoft.com/office/drawing/2014/main" id="{52E711A7-C7E4-8AC4-C7D2-72D7EE79B265}"/>
-              </a:ext>
-            </a:extLst>
-          </p:cNvPr>
+          <p:cNvPr id="6" name="灯片编号占位符 5"/>
           <p:cNvSpPr>
             <a:spLocks noGrp="1"/>
           </p:cNvSpPr>
@@ -506,18 +447,12 @@
           <a:p>
             <a:fld id="{237910C0-D9AB-4262-801A-4937D3790620}" type="slidenum">
               <a:rPr lang="zh-CN" altLang="en-US" smtClean="0"/>
-              <a:t>‹#›</a:t>
             </a:fld>
             <a:endParaRPr lang="zh-CN" altLang="en-US"/>
           </a:p>
         </p:txBody>
       </p:sp>
     </p:spTree>
-    <p:extLst>
-      <p:ext uri="{BB962C8B-B14F-4D97-AF65-F5344CB8AC3E}">
-        <p14:creationId xmlns:p14="http://schemas.microsoft.com/office/powerpoint/2010/main" val="2453354118"/>
-      </p:ext>
-    </p:extLst>
   </p:cSld>
   <p:clrMapOvr>
     <a:masterClrMapping/>
@@ -544,13 +479,7 @@
       </p:grpSpPr>
       <p:sp>
         <p:nvSpPr>
-          <p:cNvPr id="2" name="竖排标题 1">
-            <a:extLst>
-              <a:ext uri="{FF2B5EF4-FFF2-40B4-BE49-F238E27FC236}">
-                <a16:creationId xmlns:a16="http://schemas.microsoft.com/office/drawing/2014/main" id="{A228B87F-7DFE-1574-C8AE-E95A82CAB58C}"/>
-              </a:ext>
-            </a:extLst>
-          </p:cNvPr>
+          <p:cNvPr id="2" name="竖排标题 1"/>
           <p:cNvSpPr>
             <a:spLocks noGrp="1"/>
           </p:cNvSpPr>
@@ -572,18 +501,13 @@
               <a:rPr lang="zh-CN" altLang="en-US"/>
               <a:t>单击此处编辑母版标题样式</a:t>
             </a:r>
-          </a:p>
-        </p:txBody>
-      </p:sp>
-      <p:sp>
-        <p:nvSpPr>
-          <p:cNvPr id="3" name="竖排文字占位符 2">
-            <a:extLst>
-              <a:ext uri="{FF2B5EF4-FFF2-40B4-BE49-F238E27FC236}">
-                <a16:creationId xmlns:a16="http://schemas.microsoft.com/office/drawing/2014/main" id="{5BBE88B2-ABEF-8ADC-8C27-DE9EE9C477B3}"/>
-              </a:ext>
-            </a:extLst>
-          </p:cNvPr>
+            <a:endParaRPr lang="zh-CN" altLang="en-US"/>
+          </a:p>
+        </p:txBody>
+      </p:sp>
+      <p:sp>
+        <p:nvSpPr>
+          <p:cNvPr id="3" name="竖排文字占位符 2"/>
           <p:cNvSpPr>
             <a:spLocks noGrp="1"/>
           </p:cNvSpPr>
@@ -606,6 +530,7 @@
               <a:rPr lang="zh-CN" altLang="en-US"/>
               <a:t>单击此处编辑母版文本样式</a:t>
             </a:r>
+            <a:endParaRPr lang="zh-CN" altLang="en-US"/>
           </a:p>
           <a:p>
             <a:pPr lvl="1"/>
@@ -613,6 +538,7 @@
               <a:rPr lang="zh-CN" altLang="en-US"/>
               <a:t>二级</a:t>
             </a:r>
+            <a:endParaRPr lang="zh-CN" altLang="en-US"/>
           </a:p>
           <a:p>
             <a:pPr lvl="2"/>
@@ -620,6 +546,7 @@
               <a:rPr lang="zh-CN" altLang="en-US"/>
               <a:t>三级</a:t>
             </a:r>
+            <a:endParaRPr lang="zh-CN" altLang="en-US"/>
           </a:p>
           <a:p>
             <a:pPr lvl="3"/>
@@ -627,6 +554,7 @@
               <a:rPr lang="zh-CN" altLang="en-US"/>
               <a:t>四级</a:t>
             </a:r>
+            <a:endParaRPr lang="zh-CN" altLang="en-US"/>
           </a:p>
           <a:p>
             <a:pPr lvl="4"/>
@@ -634,18 +562,13 @@
               <a:rPr lang="zh-CN" altLang="en-US"/>
               <a:t>五级</a:t>
             </a:r>
-          </a:p>
-        </p:txBody>
-      </p:sp>
-      <p:sp>
-        <p:nvSpPr>
-          <p:cNvPr id="4" name="日期占位符 3">
-            <a:extLst>
-              <a:ext uri="{FF2B5EF4-FFF2-40B4-BE49-F238E27FC236}">
-                <a16:creationId xmlns:a16="http://schemas.microsoft.com/office/drawing/2014/main" id="{3129EF3C-B21F-B3C9-BD08-684CE6DB5C2B}"/>
-              </a:ext>
-            </a:extLst>
-          </p:cNvPr>
+            <a:endParaRPr lang="zh-CN" altLang="en-US"/>
+          </a:p>
+        </p:txBody>
+      </p:sp>
+      <p:sp>
+        <p:nvSpPr>
+          <p:cNvPr id="4" name="日期占位符 3"/>
           <p:cNvSpPr>
             <a:spLocks noGrp="1"/>
           </p:cNvSpPr>
@@ -660,7 +583,6 @@
           <a:p>
             <a:fld id="{48B9BF90-9AD0-4816-8801-3F9FE764476F}" type="datetimeFigureOut">
               <a:rPr lang="zh-CN" altLang="en-US" smtClean="0"/>
-              <a:t>2025/9/14</a:t>
             </a:fld>
             <a:endParaRPr lang="zh-CN" altLang="en-US"/>
           </a:p>
@@ -668,13 +590,7 @@
       </p:sp>
       <p:sp>
         <p:nvSpPr>
-          <p:cNvPr id="5" name="页脚占位符 4">
-            <a:extLst>
-              <a:ext uri="{FF2B5EF4-FFF2-40B4-BE49-F238E27FC236}">
-                <a16:creationId xmlns:a16="http://schemas.microsoft.com/office/drawing/2014/main" id="{0626DC5D-9AB8-7E8A-55A7-7D2F5B7FC490}"/>
-              </a:ext>
-            </a:extLst>
-          </p:cNvPr>
+          <p:cNvPr id="5" name="页脚占位符 4"/>
           <p:cNvSpPr>
             <a:spLocks noGrp="1"/>
           </p:cNvSpPr>
@@ -693,13 +609,7 @@
       </p:sp>
       <p:sp>
         <p:nvSpPr>
-          <p:cNvPr id="6" name="灯片编号占位符 5">
-            <a:extLst>
-              <a:ext uri="{FF2B5EF4-FFF2-40B4-BE49-F238E27FC236}">
-                <a16:creationId xmlns:a16="http://schemas.microsoft.com/office/drawing/2014/main" id="{5FDD8CD7-6B88-00E1-6F06-35D3A21AF461}"/>
-              </a:ext>
-            </a:extLst>
-          </p:cNvPr>
+          <p:cNvPr id="6" name="灯片编号占位符 5"/>
           <p:cNvSpPr>
             <a:spLocks noGrp="1"/>
           </p:cNvSpPr>
@@ -714,18 +624,12 @@
           <a:p>
             <a:fld id="{237910C0-D9AB-4262-801A-4937D3790620}" type="slidenum">
               <a:rPr lang="zh-CN" altLang="en-US" smtClean="0"/>
-              <a:t>‹#›</a:t>
             </a:fld>
             <a:endParaRPr lang="zh-CN" altLang="en-US"/>
           </a:p>
         </p:txBody>
       </p:sp>
     </p:spTree>
-    <p:extLst>
-      <p:ext uri="{BB962C8B-B14F-4D97-AF65-F5344CB8AC3E}">
-        <p14:creationId xmlns:p14="http://schemas.microsoft.com/office/powerpoint/2010/main" val="1940947643"/>
-      </p:ext>
-    </p:extLst>
   </p:cSld>
   <p:clrMapOvr>
     <a:masterClrMapping/>
@@ -752,13 +656,7 @@
       </p:grpSpPr>
       <p:sp>
         <p:nvSpPr>
-          <p:cNvPr id="2" name="标题 1">
-            <a:extLst>
-              <a:ext uri="{FF2B5EF4-FFF2-40B4-BE49-F238E27FC236}">
-                <a16:creationId xmlns:a16="http://schemas.microsoft.com/office/drawing/2014/main" id="{CA6FC97D-D06D-C84B-B44B-7C6BF55FBF33}"/>
-              </a:ext>
-            </a:extLst>
-          </p:cNvPr>
+          <p:cNvPr id="2" name="标题 1"/>
           <p:cNvSpPr>
             <a:spLocks noGrp="1"/>
           </p:cNvSpPr>
@@ -775,18 +673,13 @@
               <a:rPr lang="zh-CN" altLang="en-US"/>
               <a:t>单击此处编辑母版标题样式</a:t>
             </a:r>
-          </a:p>
-        </p:txBody>
-      </p:sp>
-      <p:sp>
-        <p:nvSpPr>
-          <p:cNvPr id="3" name="内容占位符 2">
-            <a:extLst>
-              <a:ext uri="{FF2B5EF4-FFF2-40B4-BE49-F238E27FC236}">
-                <a16:creationId xmlns:a16="http://schemas.microsoft.com/office/drawing/2014/main" id="{8A821FFB-5E6D-BBCF-3C18-96A63F826040}"/>
-              </a:ext>
-            </a:extLst>
-          </p:cNvPr>
+            <a:endParaRPr lang="zh-CN" altLang="en-US"/>
+          </a:p>
+        </p:txBody>
+      </p:sp>
+      <p:sp>
+        <p:nvSpPr>
+          <p:cNvPr id="3" name="内容占位符 2"/>
           <p:cNvSpPr>
             <a:spLocks noGrp="1"/>
           </p:cNvSpPr>
@@ -804,6 +697,7 @@
               <a:rPr lang="zh-CN" altLang="en-US"/>
               <a:t>单击此处编辑母版文本样式</a:t>
             </a:r>
+            <a:endParaRPr lang="zh-CN" altLang="en-US"/>
           </a:p>
           <a:p>
             <a:pPr lvl="1"/>
@@ -811,6 +705,7 @@
               <a:rPr lang="zh-CN" altLang="en-US"/>
               <a:t>二级</a:t>
             </a:r>
+            <a:endParaRPr lang="zh-CN" altLang="en-US"/>
           </a:p>
           <a:p>
             <a:pPr lvl="2"/>
@@ -818,6 +713,7 @@
               <a:rPr lang="zh-CN" altLang="en-US"/>
               <a:t>三级</a:t>
             </a:r>
+            <a:endParaRPr lang="zh-CN" altLang="en-US"/>
           </a:p>
           <a:p>
             <a:pPr lvl="3"/>
@@ -825,6 +721,7 @@
               <a:rPr lang="zh-CN" altLang="en-US"/>
               <a:t>四级</a:t>
             </a:r>
+            <a:endParaRPr lang="zh-CN" altLang="en-US"/>
           </a:p>
           <a:p>
             <a:pPr lvl="4"/>
@@ -832,18 +729,13 @@
               <a:rPr lang="zh-CN" altLang="en-US"/>
               <a:t>五级</a:t>
             </a:r>
-          </a:p>
-        </p:txBody>
-      </p:sp>
-      <p:sp>
-        <p:nvSpPr>
-          <p:cNvPr id="4" name="日期占位符 3">
-            <a:extLst>
-              <a:ext uri="{FF2B5EF4-FFF2-40B4-BE49-F238E27FC236}">
-                <a16:creationId xmlns:a16="http://schemas.microsoft.com/office/drawing/2014/main" id="{A57F17A2-B370-49A7-B9E6-4AE4E6D030D6}"/>
-              </a:ext>
-            </a:extLst>
-          </p:cNvPr>
+            <a:endParaRPr lang="zh-CN" altLang="en-US"/>
+          </a:p>
+        </p:txBody>
+      </p:sp>
+      <p:sp>
+        <p:nvSpPr>
+          <p:cNvPr id="4" name="日期占位符 3"/>
           <p:cNvSpPr>
             <a:spLocks noGrp="1"/>
           </p:cNvSpPr>
@@ -858,7 +750,6 @@
           <a:p>
             <a:fld id="{48B9BF90-9AD0-4816-8801-3F9FE764476F}" type="datetimeFigureOut">
               <a:rPr lang="zh-CN" altLang="en-US" smtClean="0"/>
-              <a:t>2025/9/14</a:t>
             </a:fld>
             <a:endParaRPr lang="zh-CN" altLang="en-US"/>
           </a:p>
@@ -866,13 +757,7 @@
       </p:sp>
       <p:sp>
         <p:nvSpPr>
-          <p:cNvPr id="5" name="页脚占位符 4">
-            <a:extLst>
-              <a:ext uri="{FF2B5EF4-FFF2-40B4-BE49-F238E27FC236}">
-                <a16:creationId xmlns:a16="http://schemas.microsoft.com/office/drawing/2014/main" id="{3FA531C6-1BAD-14A6-C805-D71EAD465368}"/>
-              </a:ext>
-            </a:extLst>
-          </p:cNvPr>
+          <p:cNvPr id="5" name="页脚占位符 4"/>
           <p:cNvSpPr>
             <a:spLocks noGrp="1"/>
           </p:cNvSpPr>
@@ -891,13 +776,7 @@
       </p:sp>
       <p:sp>
         <p:nvSpPr>
-          <p:cNvPr id="6" name="灯片编号占位符 5">
-            <a:extLst>
-              <a:ext uri="{FF2B5EF4-FFF2-40B4-BE49-F238E27FC236}">
-                <a16:creationId xmlns:a16="http://schemas.microsoft.com/office/drawing/2014/main" id="{5D871FAF-CF4B-522C-D3EC-EE0CA7A5320A}"/>
-              </a:ext>
-            </a:extLst>
-          </p:cNvPr>
+          <p:cNvPr id="6" name="灯片编号占位符 5"/>
           <p:cNvSpPr>
             <a:spLocks noGrp="1"/>
           </p:cNvSpPr>
@@ -912,18 +791,12 @@
           <a:p>
             <a:fld id="{237910C0-D9AB-4262-801A-4937D3790620}" type="slidenum">
               <a:rPr lang="zh-CN" altLang="en-US" smtClean="0"/>
-              <a:t>‹#›</a:t>
             </a:fld>
             <a:endParaRPr lang="zh-CN" altLang="en-US"/>
           </a:p>
         </p:txBody>
       </p:sp>
     </p:spTree>
-    <p:extLst>
-      <p:ext uri="{BB962C8B-B14F-4D97-AF65-F5344CB8AC3E}">
-        <p14:creationId xmlns:p14="http://schemas.microsoft.com/office/powerpoint/2010/main" val="2768104507"/>
-      </p:ext>
-    </p:extLst>
   </p:cSld>
   <p:clrMapOvr>
     <a:masterClrMapping/>
@@ -950,13 +823,7 @@
       </p:grpSpPr>
       <p:sp>
         <p:nvSpPr>
-          <p:cNvPr id="2" name="标题 1">
-            <a:extLst>
-              <a:ext uri="{FF2B5EF4-FFF2-40B4-BE49-F238E27FC236}">
-                <a16:creationId xmlns:a16="http://schemas.microsoft.com/office/drawing/2014/main" id="{0D4C1C94-7745-B46E-7352-8AFC53F3FD89}"/>
-              </a:ext>
-            </a:extLst>
-          </p:cNvPr>
+          <p:cNvPr id="2" name="标题 1"/>
           <p:cNvSpPr>
             <a:spLocks noGrp="1"/>
           </p:cNvSpPr>
@@ -982,18 +849,13 @@
               <a:rPr lang="zh-CN" altLang="en-US"/>
               <a:t>单击此处编辑母版标题样式</a:t>
             </a:r>
-          </a:p>
-        </p:txBody>
-      </p:sp>
-      <p:sp>
-        <p:nvSpPr>
-          <p:cNvPr id="3" name="文本占位符 2">
-            <a:extLst>
-              <a:ext uri="{FF2B5EF4-FFF2-40B4-BE49-F238E27FC236}">
-                <a16:creationId xmlns:a16="http://schemas.microsoft.com/office/drawing/2014/main" id="{1CF4ED9A-1A33-E80E-6A2E-6CD7630637F7}"/>
-              </a:ext>
-            </a:extLst>
-          </p:cNvPr>
+            <a:endParaRPr lang="zh-CN" altLang="en-US"/>
+          </a:p>
+        </p:txBody>
+      </p:sp>
+      <p:sp>
+        <p:nvSpPr>
+          <p:cNvPr id="3" name="文本占位符 2"/>
           <p:cNvSpPr>
             <a:spLocks noGrp="1"/>
           </p:cNvSpPr>
@@ -1107,18 +969,13 @@
               <a:rPr lang="zh-CN" altLang="en-US"/>
               <a:t>单击此处编辑母版文本样式</a:t>
             </a:r>
-          </a:p>
-        </p:txBody>
-      </p:sp>
-      <p:sp>
-        <p:nvSpPr>
-          <p:cNvPr id="4" name="日期占位符 3">
-            <a:extLst>
-              <a:ext uri="{FF2B5EF4-FFF2-40B4-BE49-F238E27FC236}">
-                <a16:creationId xmlns:a16="http://schemas.microsoft.com/office/drawing/2014/main" id="{2CECE10F-FB61-AD1B-3675-700862562D71}"/>
-              </a:ext>
-            </a:extLst>
-          </p:cNvPr>
+            <a:endParaRPr lang="zh-CN" altLang="en-US"/>
+          </a:p>
+        </p:txBody>
+      </p:sp>
+      <p:sp>
+        <p:nvSpPr>
+          <p:cNvPr id="4" name="日期占位符 3"/>
           <p:cNvSpPr>
             <a:spLocks noGrp="1"/>
           </p:cNvSpPr>
@@ -1133,7 +990,6 @@
           <a:p>
             <a:fld id="{48B9BF90-9AD0-4816-8801-3F9FE764476F}" type="datetimeFigureOut">
               <a:rPr lang="zh-CN" altLang="en-US" smtClean="0"/>
-              <a:t>2025/9/14</a:t>
             </a:fld>
             <a:endParaRPr lang="zh-CN" altLang="en-US"/>
           </a:p>
@@ -1141,13 +997,7 @@
       </p:sp>
       <p:sp>
         <p:nvSpPr>
-          <p:cNvPr id="5" name="页脚占位符 4">
-            <a:extLst>
-              <a:ext uri="{FF2B5EF4-FFF2-40B4-BE49-F238E27FC236}">
-                <a16:creationId xmlns:a16="http://schemas.microsoft.com/office/drawing/2014/main" id="{514A620C-1782-CC7F-B165-87C8D5E946C4}"/>
-              </a:ext>
-            </a:extLst>
-          </p:cNvPr>
+          <p:cNvPr id="5" name="页脚占位符 4"/>
           <p:cNvSpPr>
             <a:spLocks noGrp="1"/>
           </p:cNvSpPr>
@@ -1166,13 +1016,7 @@
       </p:sp>
       <p:sp>
         <p:nvSpPr>
-          <p:cNvPr id="6" name="灯片编号占位符 5">
-            <a:extLst>
-              <a:ext uri="{FF2B5EF4-FFF2-40B4-BE49-F238E27FC236}">
-                <a16:creationId xmlns:a16="http://schemas.microsoft.com/office/drawing/2014/main" id="{44613D8F-DB16-3F85-4819-B898A58D0D79}"/>
-              </a:ext>
-            </a:extLst>
-          </p:cNvPr>
+          <p:cNvPr id="6" name="灯片编号占位符 5"/>
           <p:cNvSpPr>
             <a:spLocks noGrp="1"/>
           </p:cNvSpPr>
@@ -1187,18 +1031,12 @@
           <a:p>
             <a:fld id="{237910C0-D9AB-4262-801A-4937D3790620}" type="slidenum">
               <a:rPr lang="zh-CN" altLang="en-US" smtClean="0"/>
-              <a:t>‹#›</a:t>
             </a:fld>
             <a:endParaRPr lang="zh-CN" altLang="en-US"/>
           </a:p>
         </p:txBody>
       </p:sp>
     </p:spTree>
-    <p:extLst>
-      <p:ext uri="{BB962C8B-B14F-4D97-AF65-F5344CB8AC3E}">
-        <p14:creationId xmlns:p14="http://schemas.microsoft.com/office/powerpoint/2010/main" val="3875555595"/>
-      </p:ext>
-    </p:extLst>
   </p:cSld>
   <p:clrMapOvr>
     <a:masterClrMapping/>
@@ -1225,13 +1063,7 @@
       </p:grpSpPr>
       <p:sp>
         <p:nvSpPr>
-          <p:cNvPr id="2" name="标题 1">
-            <a:extLst>
-              <a:ext uri="{FF2B5EF4-FFF2-40B4-BE49-F238E27FC236}">
-                <a16:creationId xmlns:a16="http://schemas.microsoft.com/office/drawing/2014/main" id="{33BB1471-28E2-B930-6E05-DEA264865975}"/>
-              </a:ext>
-            </a:extLst>
-          </p:cNvPr>
+          <p:cNvPr id="2" name="标题 1"/>
           <p:cNvSpPr>
             <a:spLocks noGrp="1"/>
           </p:cNvSpPr>
@@ -1248,18 +1080,13 @@
               <a:rPr lang="zh-CN" altLang="en-US"/>
               <a:t>单击此处编辑母版标题样式</a:t>
             </a:r>
-          </a:p>
-        </p:txBody>
-      </p:sp>
-      <p:sp>
-        <p:nvSpPr>
-          <p:cNvPr id="3" name="内容占位符 2">
-            <a:extLst>
-              <a:ext uri="{FF2B5EF4-FFF2-40B4-BE49-F238E27FC236}">
-                <a16:creationId xmlns:a16="http://schemas.microsoft.com/office/drawing/2014/main" id="{CEE641C9-96FA-2009-AF15-882720F335BD}"/>
-              </a:ext>
-            </a:extLst>
-          </p:cNvPr>
+            <a:endParaRPr lang="zh-CN" altLang="en-US"/>
+          </a:p>
+        </p:txBody>
+      </p:sp>
+      <p:sp>
+        <p:nvSpPr>
+          <p:cNvPr id="3" name="内容占位符 2"/>
           <p:cNvSpPr>
             <a:spLocks noGrp="1"/>
           </p:cNvSpPr>
@@ -1282,6 +1109,7 @@
               <a:rPr lang="zh-CN" altLang="en-US"/>
               <a:t>单击此处编辑母版文本样式</a:t>
             </a:r>
+            <a:endParaRPr lang="zh-CN" altLang="en-US"/>
           </a:p>
           <a:p>
             <a:pPr lvl="1"/>
@@ -1289,6 +1117,7 @@
               <a:rPr lang="zh-CN" altLang="en-US"/>
               <a:t>二级</a:t>
             </a:r>
+            <a:endParaRPr lang="zh-CN" altLang="en-US"/>
           </a:p>
           <a:p>
             <a:pPr lvl="2"/>
@@ -1296,6 +1125,7 @@
               <a:rPr lang="zh-CN" altLang="en-US"/>
               <a:t>三级</a:t>
             </a:r>
+            <a:endParaRPr lang="zh-CN" altLang="en-US"/>
           </a:p>
           <a:p>
             <a:pPr lvl="3"/>
@@ -1303,6 +1133,7 @@
               <a:rPr lang="zh-CN" altLang="en-US"/>
               <a:t>四级</a:t>
             </a:r>
+            <a:endParaRPr lang="zh-CN" altLang="en-US"/>
           </a:p>
           <a:p>
             <a:pPr lvl="4"/>
@@ -1310,18 +1141,13 @@
               <a:rPr lang="zh-CN" altLang="en-US"/>
               <a:t>五级</a:t>
             </a:r>
-          </a:p>
-        </p:txBody>
-      </p:sp>
-      <p:sp>
-        <p:nvSpPr>
-          <p:cNvPr id="4" name="内容占位符 3">
-            <a:extLst>
-              <a:ext uri="{FF2B5EF4-FFF2-40B4-BE49-F238E27FC236}">
-                <a16:creationId xmlns:a16="http://schemas.microsoft.com/office/drawing/2014/main" id="{65429A24-9706-19B3-AC81-51AAD936ECF5}"/>
-              </a:ext>
-            </a:extLst>
-          </p:cNvPr>
+            <a:endParaRPr lang="zh-CN" altLang="en-US"/>
+          </a:p>
+        </p:txBody>
+      </p:sp>
+      <p:sp>
+        <p:nvSpPr>
+          <p:cNvPr id="4" name="内容占位符 3"/>
           <p:cNvSpPr>
             <a:spLocks noGrp="1"/>
           </p:cNvSpPr>
@@ -1344,6 +1170,7 @@
               <a:rPr lang="zh-CN" altLang="en-US"/>
               <a:t>单击此处编辑母版文本样式</a:t>
             </a:r>
+            <a:endParaRPr lang="zh-CN" altLang="en-US"/>
           </a:p>
           <a:p>
             <a:pPr lvl="1"/>
@@ -1351,6 +1178,7 @@
               <a:rPr lang="zh-CN" altLang="en-US"/>
               <a:t>二级</a:t>
             </a:r>
+            <a:endParaRPr lang="zh-CN" altLang="en-US"/>
           </a:p>
           <a:p>
             <a:pPr lvl="2"/>
@@ -1358,6 +1186,7 @@
               <a:rPr lang="zh-CN" altLang="en-US"/>
               <a:t>三级</a:t>
             </a:r>
+            <a:endParaRPr lang="zh-CN" altLang="en-US"/>
           </a:p>
           <a:p>
             <a:pPr lvl="3"/>
@@ -1365,6 +1194,7 @@
               <a:rPr lang="zh-CN" altLang="en-US"/>
               <a:t>四级</a:t>
             </a:r>
+            <a:endParaRPr lang="zh-CN" altLang="en-US"/>
           </a:p>
           <a:p>
             <a:pPr lvl="4"/>
@@ -1372,18 +1202,13 @@
               <a:rPr lang="zh-CN" altLang="en-US"/>
               <a:t>五级</a:t>
             </a:r>
-          </a:p>
-        </p:txBody>
-      </p:sp>
-      <p:sp>
-        <p:nvSpPr>
-          <p:cNvPr id="5" name="日期占位符 4">
-            <a:extLst>
-              <a:ext uri="{FF2B5EF4-FFF2-40B4-BE49-F238E27FC236}">
-                <a16:creationId xmlns:a16="http://schemas.microsoft.com/office/drawing/2014/main" id="{2FF4768C-5891-3F70-0D8D-4C1C316D5DF0}"/>
-              </a:ext>
-            </a:extLst>
-          </p:cNvPr>
+            <a:endParaRPr lang="zh-CN" altLang="en-US"/>
+          </a:p>
+        </p:txBody>
+      </p:sp>
+      <p:sp>
+        <p:nvSpPr>
+          <p:cNvPr id="5" name="日期占位符 4"/>
           <p:cNvSpPr>
             <a:spLocks noGrp="1"/>
           </p:cNvSpPr>
@@ -1398,7 +1223,6 @@
           <a:p>
             <a:fld id="{48B9BF90-9AD0-4816-8801-3F9FE764476F}" type="datetimeFigureOut">
               <a:rPr lang="zh-CN" altLang="en-US" smtClean="0"/>
-              <a:t>2025/9/14</a:t>
             </a:fld>
             <a:endParaRPr lang="zh-CN" altLang="en-US"/>
           </a:p>
@@ -1406,13 +1230,7 @@
       </p:sp>
       <p:sp>
         <p:nvSpPr>
-          <p:cNvPr id="6" name="页脚占位符 5">
-            <a:extLst>
-              <a:ext uri="{FF2B5EF4-FFF2-40B4-BE49-F238E27FC236}">
-                <a16:creationId xmlns:a16="http://schemas.microsoft.com/office/drawing/2014/main" id="{32B1523B-C429-2C8E-6CEE-ABFF32320470}"/>
-              </a:ext>
-            </a:extLst>
-          </p:cNvPr>
+          <p:cNvPr id="6" name="页脚占位符 5"/>
           <p:cNvSpPr>
             <a:spLocks noGrp="1"/>
           </p:cNvSpPr>
@@ -1431,13 +1249,7 @@
       </p:sp>
       <p:sp>
         <p:nvSpPr>
-          <p:cNvPr id="7" name="灯片编号占位符 6">
-            <a:extLst>
-              <a:ext uri="{FF2B5EF4-FFF2-40B4-BE49-F238E27FC236}">
-                <a16:creationId xmlns:a16="http://schemas.microsoft.com/office/drawing/2014/main" id="{2F45D7F5-2E38-168A-8E5D-5A8E9EB86E09}"/>
-              </a:ext>
-            </a:extLst>
-          </p:cNvPr>
+          <p:cNvPr id="7" name="灯片编号占位符 6"/>
           <p:cNvSpPr>
             <a:spLocks noGrp="1"/>
           </p:cNvSpPr>
@@ -1452,18 +1264,12 @@
           <a:p>
             <a:fld id="{237910C0-D9AB-4262-801A-4937D3790620}" type="slidenum">
               <a:rPr lang="zh-CN" altLang="en-US" smtClean="0"/>
-              <a:t>‹#›</a:t>
             </a:fld>
             <a:endParaRPr lang="zh-CN" altLang="en-US"/>
           </a:p>
         </p:txBody>
       </p:sp>
     </p:spTree>
-    <p:extLst>
-      <p:ext uri="{BB962C8B-B14F-4D97-AF65-F5344CB8AC3E}">
-        <p14:creationId xmlns:p14="http://schemas.microsoft.com/office/powerpoint/2010/main" val="1607528643"/>
-      </p:ext>
-    </p:extLst>
   </p:cSld>
   <p:clrMapOvr>
     <a:masterClrMapping/>
@@ -1490,13 +1296,7 @@
       </p:grpSpPr>
       <p:sp>
         <p:nvSpPr>
-          <p:cNvPr id="2" name="标题 1">
-            <a:extLst>
-              <a:ext uri="{FF2B5EF4-FFF2-40B4-BE49-F238E27FC236}">
-                <a16:creationId xmlns:a16="http://schemas.microsoft.com/office/drawing/2014/main" id="{B572836D-84FB-479F-8047-2933ADC828C9}"/>
-              </a:ext>
-            </a:extLst>
-          </p:cNvPr>
+          <p:cNvPr id="2" name="标题 1"/>
           <p:cNvSpPr>
             <a:spLocks noGrp="1"/>
           </p:cNvSpPr>
@@ -1518,18 +1318,13 @@
               <a:rPr lang="zh-CN" altLang="en-US"/>
               <a:t>单击此处编辑母版标题样式</a:t>
             </a:r>
-          </a:p>
-        </p:txBody>
-      </p:sp>
-      <p:sp>
-        <p:nvSpPr>
-          <p:cNvPr id="3" name="文本占位符 2">
-            <a:extLst>
-              <a:ext uri="{FF2B5EF4-FFF2-40B4-BE49-F238E27FC236}">
-                <a16:creationId xmlns:a16="http://schemas.microsoft.com/office/drawing/2014/main" id="{4B3F2B1C-076E-89C6-C4FA-D9EDBBDC6626}"/>
-              </a:ext>
-            </a:extLst>
-          </p:cNvPr>
+            <a:endParaRPr lang="zh-CN" altLang="en-US"/>
+          </a:p>
+        </p:txBody>
+      </p:sp>
+      <p:sp>
+        <p:nvSpPr>
+          <p:cNvPr id="3" name="文本占位符 2"/>
           <p:cNvSpPr>
             <a:spLocks noGrp="1"/>
           </p:cNvSpPr>
@@ -1589,18 +1384,13 @@
               <a:rPr lang="zh-CN" altLang="en-US"/>
               <a:t>单击此处编辑母版文本样式</a:t>
             </a:r>
-          </a:p>
-        </p:txBody>
-      </p:sp>
-      <p:sp>
-        <p:nvSpPr>
-          <p:cNvPr id="4" name="内容占位符 3">
-            <a:extLst>
-              <a:ext uri="{FF2B5EF4-FFF2-40B4-BE49-F238E27FC236}">
-                <a16:creationId xmlns:a16="http://schemas.microsoft.com/office/drawing/2014/main" id="{6CEFD7CE-301B-BB24-26A0-8EE15CDB913C}"/>
-              </a:ext>
-            </a:extLst>
-          </p:cNvPr>
+            <a:endParaRPr lang="zh-CN" altLang="en-US"/>
+          </a:p>
+        </p:txBody>
+      </p:sp>
+      <p:sp>
+        <p:nvSpPr>
+          <p:cNvPr id="4" name="内容占位符 3"/>
           <p:cNvSpPr>
             <a:spLocks noGrp="1"/>
           </p:cNvSpPr>
@@ -1623,6 +1413,7 @@
               <a:rPr lang="zh-CN" altLang="en-US"/>
               <a:t>单击此处编辑母版文本样式</a:t>
             </a:r>
+            <a:endParaRPr lang="zh-CN" altLang="en-US"/>
           </a:p>
           <a:p>
             <a:pPr lvl="1"/>
@@ -1630,6 +1421,7 @@
               <a:rPr lang="zh-CN" altLang="en-US"/>
               <a:t>二级</a:t>
             </a:r>
+            <a:endParaRPr lang="zh-CN" altLang="en-US"/>
           </a:p>
           <a:p>
             <a:pPr lvl="2"/>
@@ -1637,6 +1429,7 @@
               <a:rPr lang="zh-CN" altLang="en-US"/>
               <a:t>三级</a:t>
             </a:r>
+            <a:endParaRPr lang="zh-CN" altLang="en-US"/>
           </a:p>
           <a:p>
             <a:pPr lvl="3"/>
@@ -1644,6 +1437,7 @@
               <a:rPr lang="zh-CN" altLang="en-US"/>
               <a:t>四级</a:t>
             </a:r>
+            <a:endParaRPr lang="zh-CN" altLang="en-US"/>
           </a:p>
           <a:p>
             <a:pPr lvl="4"/>
@@ -1651,18 +1445,13 @@
               <a:rPr lang="zh-CN" altLang="en-US"/>
               <a:t>五级</a:t>
             </a:r>
-          </a:p>
-        </p:txBody>
-      </p:sp>
-      <p:sp>
-        <p:nvSpPr>
-          <p:cNvPr id="5" name="文本占位符 4">
-            <a:extLst>
-              <a:ext uri="{FF2B5EF4-FFF2-40B4-BE49-F238E27FC236}">
-                <a16:creationId xmlns:a16="http://schemas.microsoft.com/office/drawing/2014/main" id="{C200A324-2B2F-52F5-E852-4E002519CBDA}"/>
-              </a:ext>
-            </a:extLst>
-          </p:cNvPr>
+            <a:endParaRPr lang="zh-CN" altLang="en-US"/>
+          </a:p>
+        </p:txBody>
+      </p:sp>
+      <p:sp>
+        <p:nvSpPr>
+          <p:cNvPr id="5" name="文本占位符 4"/>
           <p:cNvSpPr>
             <a:spLocks noGrp="1"/>
           </p:cNvSpPr>
@@ -1722,18 +1511,13 @@
               <a:rPr lang="zh-CN" altLang="en-US"/>
               <a:t>单击此处编辑母版文本样式</a:t>
             </a:r>
-          </a:p>
-        </p:txBody>
-      </p:sp>
-      <p:sp>
-        <p:nvSpPr>
-          <p:cNvPr id="6" name="内容占位符 5">
-            <a:extLst>
-              <a:ext uri="{FF2B5EF4-FFF2-40B4-BE49-F238E27FC236}">
-                <a16:creationId xmlns:a16="http://schemas.microsoft.com/office/drawing/2014/main" id="{3CC940C7-86F5-2D0D-95C4-122167C1FE45}"/>
-              </a:ext>
-            </a:extLst>
-          </p:cNvPr>
+            <a:endParaRPr lang="zh-CN" altLang="en-US"/>
+          </a:p>
+        </p:txBody>
+      </p:sp>
+      <p:sp>
+        <p:nvSpPr>
+          <p:cNvPr id="6" name="内容占位符 5"/>
           <p:cNvSpPr>
             <a:spLocks noGrp="1"/>
           </p:cNvSpPr>
@@ -1756,6 +1540,7 @@
               <a:rPr lang="zh-CN" altLang="en-US"/>
               <a:t>单击此处编辑母版文本样式</a:t>
             </a:r>
+            <a:endParaRPr lang="zh-CN" altLang="en-US"/>
           </a:p>
           <a:p>
             <a:pPr lvl="1"/>
@@ -1763,6 +1548,7 @@
               <a:rPr lang="zh-CN" altLang="en-US"/>
               <a:t>二级</a:t>
             </a:r>
+            <a:endParaRPr lang="zh-CN" altLang="en-US"/>
           </a:p>
           <a:p>
             <a:pPr lvl="2"/>
@@ -1770,6 +1556,7 @@
               <a:rPr lang="zh-CN" altLang="en-US"/>
               <a:t>三级</a:t>
             </a:r>
+            <a:endParaRPr lang="zh-CN" altLang="en-US"/>
           </a:p>
           <a:p>
             <a:pPr lvl="3"/>
@@ -1777,6 +1564,7 @@
               <a:rPr lang="zh-CN" altLang="en-US"/>
               <a:t>四级</a:t>
             </a:r>
+            <a:endParaRPr lang="zh-CN" altLang="en-US"/>
           </a:p>
           <a:p>
             <a:pPr lvl="4"/>
@@ -1784,18 +1572,13 @@
               <a:rPr lang="zh-CN" altLang="en-US"/>
               <a:t>五级</a:t>
             </a:r>
-          </a:p>
-        </p:txBody>
-      </p:sp>
-      <p:sp>
-        <p:nvSpPr>
-          <p:cNvPr id="7" name="日期占位符 6">
-            <a:extLst>
-              <a:ext uri="{FF2B5EF4-FFF2-40B4-BE49-F238E27FC236}">
-                <a16:creationId xmlns:a16="http://schemas.microsoft.com/office/drawing/2014/main" id="{3628FABD-A1A9-752B-D40A-D64DF8EE1032}"/>
-              </a:ext>
-            </a:extLst>
-          </p:cNvPr>
+            <a:endParaRPr lang="zh-CN" altLang="en-US"/>
+          </a:p>
+        </p:txBody>
+      </p:sp>
+      <p:sp>
+        <p:nvSpPr>
+          <p:cNvPr id="7" name="日期占位符 6"/>
           <p:cNvSpPr>
             <a:spLocks noGrp="1"/>
           </p:cNvSpPr>
@@ -1810,7 +1593,6 @@
           <a:p>
             <a:fld id="{48B9BF90-9AD0-4816-8801-3F9FE764476F}" type="datetimeFigureOut">
               <a:rPr lang="zh-CN" altLang="en-US" smtClean="0"/>
-              <a:t>2025/9/14</a:t>
             </a:fld>
             <a:endParaRPr lang="zh-CN" altLang="en-US"/>
           </a:p>
@@ -1818,13 +1600,7 @@
       </p:sp>
       <p:sp>
         <p:nvSpPr>
-          <p:cNvPr id="8" name="页脚占位符 7">
-            <a:extLst>
-              <a:ext uri="{FF2B5EF4-FFF2-40B4-BE49-F238E27FC236}">
-                <a16:creationId xmlns:a16="http://schemas.microsoft.com/office/drawing/2014/main" id="{A68E857C-BFD9-5AB5-AE74-B91E9CC8A3EC}"/>
-              </a:ext>
-            </a:extLst>
-          </p:cNvPr>
+          <p:cNvPr id="8" name="页脚占位符 7"/>
           <p:cNvSpPr>
             <a:spLocks noGrp="1"/>
           </p:cNvSpPr>
@@ -1843,13 +1619,7 @@
       </p:sp>
       <p:sp>
         <p:nvSpPr>
-          <p:cNvPr id="9" name="灯片编号占位符 8">
-            <a:extLst>
-              <a:ext uri="{FF2B5EF4-FFF2-40B4-BE49-F238E27FC236}">
-                <a16:creationId xmlns:a16="http://schemas.microsoft.com/office/drawing/2014/main" id="{4103616A-97FD-A870-E948-DFA34BBD54F4}"/>
-              </a:ext>
-            </a:extLst>
-          </p:cNvPr>
+          <p:cNvPr id="9" name="灯片编号占位符 8"/>
           <p:cNvSpPr>
             <a:spLocks noGrp="1"/>
           </p:cNvSpPr>
@@ -1864,18 +1634,12 @@
           <a:p>
             <a:fld id="{237910C0-D9AB-4262-801A-4937D3790620}" type="slidenum">
               <a:rPr lang="zh-CN" altLang="en-US" smtClean="0"/>
-              <a:t>‹#›</a:t>
             </a:fld>
             <a:endParaRPr lang="zh-CN" altLang="en-US"/>
           </a:p>
         </p:txBody>
       </p:sp>
     </p:spTree>
-    <p:extLst>
-      <p:ext uri="{BB962C8B-B14F-4D97-AF65-F5344CB8AC3E}">
-        <p14:creationId xmlns:p14="http://schemas.microsoft.com/office/powerpoint/2010/main" val="3672525831"/>
-      </p:ext>
-    </p:extLst>
   </p:cSld>
   <p:clrMapOvr>
     <a:masterClrMapping/>
@@ -1902,13 +1666,7 @@
       </p:grpSpPr>
       <p:sp>
         <p:nvSpPr>
-          <p:cNvPr id="2" name="标题 1">
-            <a:extLst>
-              <a:ext uri="{FF2B5EF4-FFF2-40B4-BE49-F238E27FC236}">
-                <a16:creationId xmlns:a16="http://schemas.microsoft.com/office/drawing/2014/main" id="{3B9F62CD-6989-A8E8-A0D7-1DE7010B89C2}"/>
-              </a:ext>
-            </a:extLst>
-          </p:cNvPr>
+          <p:cNvPr id="2" name="标题 1"/>
           <p:cNvSpPr>
             <a:spLocks noGrp="1"/>
           </p:cNvSpPr>
@@ -1925,18 +1683,13 @@
               <a:rPr lang="zh-CN" altLang="en-US"/>
               <a:t>单击此处编辑母版标题样式</a:t>
             </a:r>
-          </a:p>
-        </p:txBody>
-      </p:sp>
-      <p:sp>
-        <p:nvSpPr>
-          <p:cNvPr id="3" name="日期占位符 2">
-            <a:extLst>
-              <a:ext uri="{FF2B5EF4-FFF2-40B4-BE49-F238E27FC236}">
-                <a16:creationId xmlns:a16="http://schemas.microsoft.com/office/drawing/2014/main" id="{BAB73D8C-08F1-A77C-3D0F-C25AFE19AD47}"/>
-              </a:ext>
-            </a:extLst>
-          </p:cNvPr>
+            <a:endParaRPr lang="zh-CN" altLang="en-US"/>
+          </a:p>
+        </p:txBody>
+      </p:sp>
+      <p:sp>
+        <p:nvSpPr>
+          <p:cNvPr id="3" name="日期占位符 2"/>
           <p:cNvSpPr>
             <a:spLocks noGrp="1"/>
           </p:cNvSpPr>
@@ -1951,7 +1704,6 @@
           <a:p>
             <a:fld id="{48B9BF90-9AD0-4816-8801-3F9FE764476F}" type="datetimeFigureOut">
               <a:rPr lang="zh-CN" altLang="en-US" smtClean="0"/>
-              <a:t>2025/9/14</a:t>
             </a:fld>
             <a:endParaRPr lang="zh-CN" altLang="en-US"/>
           </a:p>
@@ -1959,13 +1711,7 @@
       </p:sp>
       <p:sp>
         <p:nvSpPr>
-          <p:cNvPr id="4" name="页脚占位符 3">
-            <a:extLst>
-              <a:ext uri="{FF2B5EF4-FFF2-40B4-BE49-F238E27FC236}">
-                <a16:creationId xmlns:a16="http://schemas.microsoft.com/office/drawing/2014/main" id="{78EA788C-1038-4453-10DD-4044CD306747}"/>
-              </a:ext>
-            </a:extLst>
-          </p:cNvPr>
+          <p:cNvPr id="4" name="页脚占位符 3"/>
           <p:cNvSpPr>
             <a:spLocks noGrp="1"/>
           </p:cNvSpPr>
@@ -1984,13 +1730,7 @@
       </p:sp>
       <p:sp>
         <p:nvSpPr>
-          <p:cNvPr id="5" name="灯片编号占位符 4">
-            <a:extLst>
-              <a:ext uri="{FF2B5EF4-FFF2-40B4-BE49-F238E27FC236}">
-                <a16:creationId xmlns:a16="http://schemas.microsoft.com/office/drawing/2014/main" id="{99C93E82-D374-C7A7-4877-84185C6872BE}"/>
-              </a:ext>
-            </a:extLst>
-          </p:cNvPr>
+          <p:cNvPr id="5" name="灯片编号占位符 4"/>
           <p:cNvSpPr>
             <a:spLocks noGrp="1"/>
           </p:cNvSpPr>
@@ -2005,18 +1745,12 @@
           <a:p>
             <a:fld id="{237910C0-D9AB-4262-801A-4937D3790620}" type="slidenum">
               <a:rPr lang="zh-CN" altLang="en-US" smtClean="0"/>
-              <a:t>‹#›</a:t>
             </a:fld>
             <a:endParaRPr lang="zh-CN" altLang="en-US"/>
           </a:p>
         </p:txBody>
       </p:sp>
     </p:spTree>
-    <p:extLst>
-      <p:ext uri="{BB962C8B-B14F-4D97-AF65-F5344CB8AC3E}">
-        <p14:creationId xmlns:p14="http://schemas.microsoft.com/office/powerpoint/2010/main" val="1292539967"/>
-      </p:ext>
-    </p:extLst>
   </p:cSld>
   <p:clrMapOvr>
     <a:masterClrMapping/>
@@ -2043,13 +1777,7 @@
       </p:grpSpPr>
       <p:sp>
         <p:nvSpPr>
-          <p:cNvPr id="2" name="日期占位符 1">
-            <a:extLst>
-              <a:ext uri="{FF2B5EF4-FFF2-40B4-BE49-F238E27FC236}">
-                <a16:creationId xmlns:a16="http://schemas.microsoft.com/office/drawing/2014/main" id="{65C7E897-5B04-B6B4-AE43-E761D1A9DE90}"/>
-              </a:ext>
-            </a:extLst>
-          </p:cNvPr>
+          <p:cNvPr id="2" name="日期占位符 1"/>
           <p:cNvSpPr>
             <a:spLocks noGrp="1"/>
           </p:cNvSpPr>
@@ -2064,7 +1792,6 @@
           <a:p>
             <a:fld id="{48B9BF90-9AD0-4816-8801-3F9FE764476F}" type="datetimeFigureOut">
               <a:rPr lang="zh-CN" altLang="en-US" smtClean="0"/>
-              <a:t>2025/9/14</a:t>
             </a:fld>
             <a:endParaRPr lang="zh-CN" altLang="en-US"/>
           </a:p>
@@ -2072,13 +1799,7 @@
       </p:sp>
       <p:sp>
         <p:nvSpPr>
-          <p:cNvPr id="3" name="页脚占位符 2">
-            <a:extLst>
-              <a:ext uri="{FF2B5EF4-FFF2-40B4-BE49-F238E27FC236}">
-                <a16:creationId xmlns:a16="http://schemas.microsoft.com/office/drawing/2014/main" id="{3F8BA785-1F25-65DB-3138-33C645819B8F}"/>
-              </a:ext>
-            </a:extLst>
-          </p:cNvPr>
+          <p:cNvPr id="3" name="页脚占位符 2"/>
           <p:cNvSpPr>
             <a:spLocks noGrp="1"/>
           </p:cNvSpPr>
@@ -2097,13 +1818,7 @@
       </p:sp>
       <p:sp>
         <p:nvSpPr>
-          <p:cNvPr id="4" name="灯片编号占位符 3">
-            <a:extLst>
-              <a:ext uri="{FF2B5EF4-FFF2-40B4-BE49-F238E27FC236}">
-                <a16:creationId xmlns:a16="http://schemas.microsoft.com/office/drawing/2014/main" id="{972DAB15-2649-B024-70C5-AC3882AF00F2}"/>
-              </a:ext>
-            </a:extLst>
-          </p:cNvPr>
+          <p:cNvPr id="4" name="灯片编号占位符 3"/>
           <p:cNvSpPr>
             <a:spLocks noGrp="1"/>
           </p:cNvSpPr>
@@ -2118,18 +1833,12 @@
           <a:p>
             <a:fld id="{237910C0-D9AB-4262-801A-4937D3790620}" type="slidenum">
               <a:rPr lang="zh-CN" altLang="en-US" smtClean="0"/>
-              <a:t>‹#›</a:t>
             </a:fld>
             <a:endParaRPr lang="zh-CN" altLang="en-US"/>
           </a:p>
         </p:txBody>
       </p:sp>
     </p:spTree>
-    <p:extLst>
-      <p:ext uri="{BB962C8B-B14F-4D97-AF65-F5344CB8AC3E}">
-        <p14:creationId xmlns:p14="http://schemas.microsoft.com/office/powerpoint/2010/main" val="799443202"/>
-      </p:ext>
-    </p:extLst>
   </p:cSld>
   <p:clrMapOvr>
     <a:masterClrMapping/>
@@ -2156,13 +1865,7 @@
       </p:grpSpPr>
       <p:sp>
         <p:nvSpPr>
-          <p:cNvPr id="2" name="标题 1">
-            <a:extLst>
-              <a:ext uri="{FF2B5EF4-FFF2-40B4-BE49-F238E27FC236}">
-                <a16:creationId xmlns:a16="http://schemas.microsoft.com/office/drawing/2014/main" id="{919965B0-1EFC-3F84-F014-AE4E10AFB9B7}"/>
-              </a:ext>
-            </a:extLst>
-          </p:cNvPr>
+          <p:cNvPr id="2" name="标题 1"/>
           <p:cNvSpPr>
             <a:spLocks noGrp="1"/>
           </p:cNvSpPr>
@@ -2188,18 +1891,13 @@
               <a:rPr lang="zh-CN" altLang="en-US"/>
               <a:t>单击此处编辑母版标题样式</a:t>
             </a:r>
-          </a:p>
-        </p:txBody>
-      </p:sp>
-      <p:sp>
-        <p:nvSpPr>
-          <p:cNvPr id="3" name="内容占位符 2">
-            <a:extLst>
-              <a:ext uri="{FF2B5EF4-FFF2-40B4-BE49-F238E27FC236}">
-                <a16:creationId xmlns:a16="http://schemas.microsoft.com/office/drawing/2014/main" id="{FB4F9200-C845-D94F-7F82-D462B0AD3372}"/>
-              </a:ext>
-            </a:extLst>
-          </p:cNvPr>
+            <a:endParaRPr lang="zh-CN" altLang="en-US"/>
+          </a:p>
+        </p:txBody>
+      </p:sp>
+      <p:sp>
+        <p:nvSpPr>
+          <p:cNvPr id="3" name="内容占位符 2"/>
           <p:cNvSpPr>
             <a:spLocks noGrp="1"/>
           </p:cNvSpPr>
@@ -2250,6 +1948,7 @@
               <a:rPr lang="zh-CN" altLang="en-US"/>
               <a:t>单击此处编辑母版文本样式</a:t>
             </a:r>
+            <a:endParaRPr lang="zh-CN" altLang="en-US"/>
           </a:p>
           <a:p>
             <a:pPr lvl="1"/>
@@ -2257,6 +1956,7 @@
               <a:rPr lang="zh-CN" altLang="en-US"/>
               <a:t>二级</a:t>
             </a:r>
+            <a:endParaRPr lang="zh-CN" altLang="en-US"/>
           </a:p>
           <a:p>
             <a:pPr lvl="2"/>
@@ -2264,6 +1964,7 @@
               <a:rPr lang="zh-CN" altLang="en-US"/>
               <a:t>三级</a:t>
             </a:r>
+            <a:endParaRPr lang="zh-CN" altLang="en-US"/>
           </a:p>
           <a:p>
             <a:pPr lvl="3"/>
@@ -2271,6 +1972,7 @@
               <a:rPr lang="zh-CN" altLang="en-US"/>
               <a:t>四级</a:t>
             </a:r>
+            <a:endParaRPr lang="zh-CN" altLang="en-US"/>
           </a:p>
           <a:p>
             <a:pPr lvl="4"/>
@@ -2278,18 +1980,13 @@
               <a:rPr lang="zh-CN" altLang="en-US"/>
               <a:t>五级</a:t>
             </a:r>
-          </a:p>
-        </p:txBody>
-      </p:sp>
-      <p:sp>
-        <p:nvSpPr>
-          <p:cNvPr id="4" name="文本占位符 3">
-            <a:extLst>
-              <a:ext uri="{FF2B5EF4-FFF2-40B4-BE49-F238E27FC236}">
-                <a16:creationId xmlns:a16="http://schemas.microsoft.com/office/drawing/2014/main" id="{48573800-A524-3C80-838D-BE0B5E8F3A74}"/>
-              </a:ext>
-            </a:extLst>
-          </p:cNvPr>
+            <a:endParaRPr lang="zh-CN" altLang="en-US"/>
+          </a:p>
+        </p:txBody>
+      </p:sp>
+      <p:sp>
+        <p:nvSpPr>
+          <p:cNvPr id="4" name="文本占位符 3"/>
           <p:cNvSpPr>
             <a:spLocks noGrp="1"/>
           </p:cNvSpPr>
@@ -2349,18 +2046,13 @@
               <a:rPr lang="zh-CN" altLang="en-US"/>
               <a:t>单击此处编辑母版文本样式</a:t>
             </a:r>
-          </a:p>
-        </p:txBody>
-      </p:sp>
-      <p:sp>
-        <p:nvSpPr>
-          <p:cNvPr id="5" name="日期占位符 4">
-            <a:extLst>
-              <a:ext uri="{FF2B5EF4-FFF2-40B4-BE49-F238E27FC236}">
-                <a16:creationId xmlns:a16="http://schemas.microsoft.com/office/drawing/2014/main" id="{205FD663-2792-7967-19E7-E5A0A4BE130A}"/>
-              </a:ext>
-            </a:extLst>
-          </p:cNvPr>
+            <a:endParaRPr lang="zh-CN" altLang="en-US"/>
+          </a:p>
+        </p:txBody>
+      </p:sp>
+      <p:sp>
+        <p:nvSpPr>
+          <p:cNvPr id="5" name="日期占位符 4"/>
           <p:cNvSpPr>
             <a:spLocks noGrp="1"/>
           </p:cNvSpPr>
@@ -2375,7 +2067,6 @@
           <a:p>
             <a:fld id="{48B9BF90-9AD0-4816-8801-3F9FE764476F}" type="datetimeFigureOut">
               <a:rPr lang="zh-CN" altLang="en-US" smtClean="0"/>
-              <a:t>2025/9/14</a:t>
             </a:fld>
             <a:endParaRPr lang="zh-CN" altLang="en-US"/>
           </a:p>
@@ -2383,13 +2074,7 @@
       </p:sp>
       <p:sp>
         <p:nvSpPr>
-          <p:cNvPr id="6" name="页脚占位符 5">
-            <a:extLst>
-              <a:ext uri="{FF2B5EF4-FFF2-40B4-BE49-F238E27FC236}">
-                <a16:creationId xmlns:a16="http://schemas.microsoft.com/office/drawing/2014/main" id="{D866DE0B-A557-866F-DE23-D84A0C940EC6}"/>
-              </a:ext>
-            </a:extLst>
-          </p:cNvPr>
+          <p:cNvPr id="6" name="页脚占位符 5"/>
           <p:cNvSpPr>
             <a:spLocks noGrp="1"/>
           </p:cNvSpPr>
@@ -2408,13 +2093,7 @@
       </p:sp>
       <p:sp>
         <p:nvSpPr>
-          <p:cNvPr id="7" name="灯片编号占位符 6">
-            <a:extLst>
-              <a:ext uri="{FF2B5EF4-FFF2-40B4-BE49-F238E27FC236}">
-                <a16:creationId xmlns:a16="http://schemas.microsoft.com/office/drawing/2014/main" id="{F4E71172-0EB8-EC22-677C-BC16929F31CC}"/>
-              </a:ext>
-            </a:extLst>
-          </p:cNvPr>
+          <p:cNvPr id="7" name="灯片编号占位符 6"/>
           <p:cNvSpPr>
             <a:spLocks noGrp="1"/>
           </p:cNvSpPr>
@@ -2429,18 +2108,12 @@
           <a:p>
             <a:fld id="{237910C0-D9AB-4262-801A-4937D3790620}" type="slidenum">
               <a:rPr lang="zh-CN" altLang="en-US" smtClean="0"/>
-              <a:t>‹#›</a:t>
             </a:fld>
             <a:endParaRPr lang="zh-CN" altLang="en-US"/>
           </a:p>
         </p:txBody>
       </p:sp>
     </p:spTree>
-    <p:extLst>
-      <p:ext uri="{BB962C8B-B14F-4D97-AF65-F5344CB8AC3E}">
-        <p14:creationId xmlns:p14="http://schemas.microsoft.com/office/powerpoint/2010/main" val="4255645589"/>
-      </p:ext>
-    </p:extLst>
   </p:cSld>
   <p:clrMapOvr>
     <a:masterClrMapping/>
@@ -2467,13 +2140,7 @@
       </p:grpSpPr>
       <p:sp>
         <p:nvSpPr>
-          <p:cNvPr id="2" name="标题 1">
-            <a:extLst>
-              <a:ext uri="{FF2B5EF4-FFF2-40B4-BE49-F238E27FC236}">
-                <a16:creationId xmlns:a16="http://schemas.microsoft.com/office/drawing/2014/main" id="{777A3A05-C98D-4C67-593B-20EF4FDA0FAA}"/>
-              </a:ext>
-            </a:extLst>
-          </p:cNvPr>
+          <p:cNvPr id="2" name="标题 1"/>
           <p:cNvSpPr>
             <a:spLocks noGrp="1"/>
           </p:cNvSpPr>
@@ -2499,18 +2166,13 @@
               <a:rPr lang="zh-CN" altLang="en-US"/>
               <a:t>单击此处编辑母版标题样式</a:t>
             </a:r>
-          </a:p>
-        </p:txBody>
-      </p:sp>
-      <p:sp>
-        <p:nvSpPr>
-          <p:cNvPr id="3" name="图片占位符 2">
-            <a:extLst>
-              <a:ext uri="{FF2B5EF4-FFF2-40B4-BE49-F238E27FC236}">
-                <a16:creationId xmlns:a16="http://schemas.microsoft.com/office/drawing/2014/main" id="{70D1FD61-D40C-0500-34F5-89E086F6CA08}"/>
-              </a:ext>
-            </a:extLst>
-          </p:cNvPr>
+            <a:endParaRPr lang="zh-CN" altLang="en-US"/>
+          </a:p>
+        </p:txBody>
+      </p:sp>
+      <p:sp>
+        <p:nvSpPr>
+          <p:cNvPr id="3" name="图片占位符 2"/>
           <p:cNvSpPr>
             <a:spLocks noGrp="1"/>
           </p:cNvSpPr>
@@ -2571,13 +2233,7 @@
       </p:sp>
       <p:sp>
         <p:nvSpPr>
-          <p:cNvPr id="4" name="文本占位符 3">
-            <a:extLst>
-              <a:ext uri="{FF2B5EF4-FFF2-40B4-BE49-F238E27FC236}">
-                <a16:creationId xmlns:a16="http://schemas.microsoft.com/office/drawing/2014/main" id="{83917708-1217-670A-F1EF-055012188759}"/>
-              </a:ext>
-            </a:extLst>
-          </p:cNvPr>
+          <p:cNvPr id="4" name="文本占位符 3"/>
           <p:cNvSpPr>
             <a:spLocks noGrp="1"/>
           </p:cNvSpPr>
@@ -2637,18 +2293,13 @@
               <a:rPr lang="zh-CN" altLang="en-US"/>
               <a:t>单击此处编辑母版文本样式</a:t>
             </a:r>
-          </a:p>
-        </p:txBody>
-      </p:sp>
-      <p:sp>
-        <p:nvSpPr>
-          <p:cNvPr id="5" name="日期占位符 4">
-            <a:extLst>
-              <a:ext uri="{FF2B5EF4-FFF2-40B4-BE49-F238E27FC236}">
-                <a16:creationId xmlns:a16="http://schemas.microsoft.com/office/drawing/2014/main" id="{53931E8B-8142-737D-4B0F-53EA03E32FA6}"/>
-              </a:ext>
-            </a:extLst>
-          </p:cNvPr>
+            <a:endParaRPr lang="zh-CN" altLang="en-US"/>
+          </a:p>
+        </p:txBody>
+      </p:sp>
+      <p:sp>
+        <p:nvSpPr>
+          <p:cNvPr id="5" name="日期占位符 4"/>
           <p:cNvSpPr>
             <a:spLocks noGrp="1"/>
           </p:cNvSpPr>
@@ -2663,7 +2314,6 @@
           <a:p>
             <a:fld id="{48B9BF90-9AD0-4816-8801-3F9FE764476F}" type="datetimeFigureOut">
               <a:rPr lang="zh-CN" altLang="en-US" smtClean="0"/>
-              <a:t>2025/9/14</a:t>
             </a:fld>
             <a:endParaRPr lang="zh-CN" altLang="en-US"/>
           </a:p>
@@ -2671,13 +2321,7 @@
       </p:sp>
       <p:sp>
         <p:nvSpPr>
-          <p:cNvPr id="6" name="页脚占位符 5">
-            <a:extLst>
-              <a:ext uri="{FF2B5EF4-FFF2-40B4-BE49-F238E27FC236}">
-                <a16:creationId xmlns:a16="http://schemas.microsoft.com/office/drawing/2014/main" id="{EE3FBA3C-D847-9CA0-9193-484790F50B8B}"/>
-              </a:ext>
-            </a:extLst>
-          </p:cNvPr>
+          <p:cNvPr id="6" name="页脚占位符 5"/>
           <p:cNvSpPr>
             <a:spLocks noGrp="1"/>
           </p:cNvSpPr>
@@ -2696,13 +2340,7 @@
       </p:sp>
       <p:sp>
         <p:nvSpPr>
-          <p:cNvPr id="7" name="灯片编号占位符 6">
-            <a:extLst>
-              <a:ext uri="{FF2B5EF4-FFF2-40B4-BE49-F238E27FC236}">
-                <a16:creationId xmlns:a16="http://schemas.microsoft.com/office/drawing/2014/main" id="{741D31B8-DE2F-C110-3C79-1C26E15D0CBD}"/>
-              </a:ext>
-            </a:extLst>
-          </p:cNvPr>
+          <p:cNvPr id="7" name="灯片编号占位符 6"/>
           <p:cNvSpPr>
             <a:spLocks noGrp="1"/>
           </p:cNvSpPr>
@@ -2717,18 +2355,12 @@
           <a:p>
             <a:fld id="{237910C0-D9AB-4262-801A-4937D3790620}" type="slidenum">
               <a:rPr lang="zh-CN" altLang="en-US" smtClean="0"/>
-              <a:t>‹#›</a:t>
             </a:fld>
             <a:endParaRPr lang="zh-CN" altLang="en-US"/>
           </a:p>
         </p:txBody>
       </p:sp>
     </p:spTree>
-    <p:extLst>
-      <p:ext uri="{BB962C8B-B14F-4D97-AF65-F5344CB8AC3E}">
-        <p14:creationId xmlns:p14="http://schemas.microsoft.com/office/powerpoint/2010/main" val="1406729818"/>
-      </p:ext>
-    </p:extLst>
   </p:cSld>
   <p:clrMapOvr>
     <a:masterClrMapping/>
@@ -2760,13 +2392,7 @@
       </p:grpSpPr>
       <p:sp>
         <p:nvSpPr>
-          <p:cNvPr id="2" name="标题占位符 1">
-            <a:extLst>
-              <a:ext uri="{FF2B5EF4-FFF2-40B4-BE49-F238E27FC236}">
-                <a16:creationId xmlns:a16="http://schemas.microsoft.com/office/drawing/2014/main" id="{0B72AB59-F3DA-86BB-6C08-DE9A3034B5DD}"/>
-              </a:ext>
-            </a:extLst>
-          </p:cNvPr>
+          <p:cNvPr id="2" name="标题占位符 1"/>
           <p:cNvSpPr>
             <a:spLocks noGrp="1"/>
           </p:cNvSpPr>
@@ -2793,18 +2419,13 @@
               <a:rPr lang="zh-CN" altLang="en-US"/>
               <a:t>单击此处编辑母版标题样式</a:t>
             </a:r>
-          </a:p>
-        </p:txBody>
-      </p:sp>
-      <p:sp>
-        <p:nvSpPr>
-          <p:cNvPr id="3" name="文本占位符 2">
-            <a:extLst>
-              <a:ext uri="{FF2B5EF4-FFF2-40B4-BE49-F238E27FC236}">
-                <a16:creationId xmlns:a16="http://schemas.microsoft.com/office/drawing/2014/main" id="{9553A423-3372-071B-5E09-770B287487E4}"/>
-              </a:ext>
-            </a:extLst>
-          </p:cNvPr>
+            <a:endParaRPr lang="zh-CN" altLang="en-US"/>
+          </a:p>
+        </p:txBody>
+      </p:sp>
+      <p:sp>
+        <p:nvSpPr>
+          <p:cNvPr id="3" name="文本占位符 2"/>
           <p:cNvSpPr>
             <a:spLocks noGrp="1"/>
           </p:cNvSpPr>
@@ -2832,6 +2453,7 @@
               <a:rPr lang="zh-CN" altLang="en-US"/>
               <a:t>单击此处编辑母版文本样式</a:t>
             </a:r>
+            <a:endParaRPr lang="zh-CN" altLang="en-US"/>
           </a:p>
           <a:p>
             <a:pPr lvl="1"/>
@@ -2839,6 +2461,7 @@
               <a:rPr lang="zh-CN" altLang="en-US"/>
               <a:t>二级</a:t>
             </a:r>
+            <a:endParaRPr lang="zh-CN" altLang="en-US"/>
           </a:p>
           <a:p>
             <a:pPr lvl="2"/>
@@ -2846,6 +2469,7 @@
               <a:rPr lang="zh-CN" altLang="en-US"/>
               <a:t>三级</a:t>
             </a:r>
+            <a:endParaRPr lang="zh-CN" altLang="en-US"/>
           </a:p>
           <a:p>
             <a:pPr lvl="3"/>
@@ -2853,6 +2477,7 @@
               <a:rPr lang="zh-CN" altLang="en-US"/>
               <a:t>四级</a:t>
             </a:r>
+            <a:endParaRPr lang="zh-CN" altLang="en-US"/>
           </a:p>
           <a:p>
             <a:pPr lvl="4"/>
@@ -2860,18 +2485,13 @@
               <a:rPr lang="zh-CN" altLang="en-US"/>
               <a:t>五级</a:t>
             </a:r>
-          </a:p>
-        </p:txBody>
-      </p:sp>
-      <p:sp>
-        <p:nvSpPr>
-          <p:cNvPr id="4" name="日期占位符 3">
-            <a:extLst>
-              <a:ext uri="{FF2B5EF4-FFF2-40B4-BE49-F238E27FC236}">
-                <a16:creationId xmlns:a16="http://schemas.microsoft.com/office/drawing/2014/main" id="{B20EF524-952E-56CA-D56B-9CA403647B76}"/>
-              </a:ext>
-            </a:extLst>
-          </p:cNvPr>
+            <a:endParaRPr lang="zh-CN" altLang="en-US"/>
+          </a:p>
+        </p:txBody>
+      </p:sp>
+      <p:sp>
+        <p:nvSpPr>
+          <p:cNvPr id="4" name="日期占位符 3"/>
           <p:cNvSpPr>
             <a:spLocks noGrp="1"/>
           </p:cNvSpPr>
@@ -2904,7 +2524,6 @@
           <a:p>
             <a:fld id="{48B9BF90-9AD0-4816-8801-3F9FE764476F}" type="datetimeFigureOut">
               <a:rPr lang="zh-CN" altLang="en-US" smtClean="0"/>
-              <a:t>2025/9/14</a:t>
             </a:fld>
             <a:endParaRPr lang="zh-CN" altLang="en-US"/>
           </a:p>
@@ -2912,13 +2531,7 @@
       </p:sp>
       <p:sp>
         <p:nvSpPr>
-          <p:cNvPr id="5" name="页脚占位符 4">
-            <a:extLst>
-              <a:ext uri="{FF2B5EF4-FFF2-40B4-BE49-F238E27FC236}">
-                <a16:creationId xmlns:a16="http://schemas.microsoft.com/office/drawing/2014/main" id="{FD2AA2AE-B645-F0F4-855F-989BC42F38BB}"/>
-              </a:ext>
-            </a:extLst>
-          </p:cNvPr>
+          <p:cNvPr id="5" name="页脚占位符 4"/>
           <p:cNvSpPr>
             <a:spLocks noGrp="1"/>
           </p:cNvSpPr>
@@ -2955,13 +2568,7 @@
       </p:sp>
       <p:sp>
         <p:nvSpPr>
-          <p:cNvPr id="6" name="灯片编号占位符 5">
-            <a:extLst>
-              <a:ext uri="{FF2B5EF4-FFF2-40B4-BE49-F238E27FC236}">
-                <a16:creationId xmlns:a16="http://schemas.microsoft.com/office/drawing/2014/main" id="{1D20EA44-8C5B-AE5F-15D7-A835BD604B7B}"/>
-              </a:ext>
-            </a:extLst>
-          </p:cNvPr>
+          <p:cNvPr id="6" name="灯片编号占位符 5"/>
           <p:cNvSpPr>
             <a:spLocks noGrp="1"/>
           </p:cNvSpPr>
@@ -2994,18 +2601,12 @@
           <a:p>
             <a:fld id="{237910C0-D9AB-4262-801A-4937D3790620}" type="slidenum">
               <a:rPr lang="zh-CN" altLang="en-US" smtClean="0"/>
-              <a:t>‹#›</a:t>
             </a:fld>
             <a:endParaRPr lang="zh-CN" altLang="en-US"/>
           </a:p>
         </p:txBody>
       </p:sp>
     </p:spTree>
-    <p:extLst>
-      <p:ext uri="{BB962C8B-B14F-4D97-AF65-F5344CB8AC3E}">
-        <p14:creationId xmlns:p14="http://schemas.microsoft.com/office/powerpoint/2010/main" val="1839529578"/>
-      </p:ext>
-    </p:extLst>
   </p:cSld>
   <p:clrMap bg1="lt1" tx1="dk1" bg2="lt2" tx2="dk2" accent1="accent1" accent2="accent2" accent3="accent3" accent4="accent4" accent5="accent5" accent6="accent6" hlink="hlink" folHlink="folHlink"/>
   <p:sldLayoutIdLst>
@@ -3049,7 +2650,7 @@
         <a:spcBef>
           <a:spcPts val="1000"/>
         </a:spcBef>
-        <a:buFont typeface="Arial" panose="020B0604020202020204" pitchFamily="34" charset="0"/>
+        <a:buFont typeface="Arial" panose="020B0604020202090204" pitchFamily="34" charset="0"/>
         <a:buChar char="•"/>
         <a:defRPr sz="2800" kern="1200">
           <a:solidFill>
@@ -3067,7 +2668,7 @@
         <a:spcBef>
           <a:spcPts val="500"/>
         </a:spcBef>
-        <a:buFont typeface="Arial" panose="020B0604020202020204" pitchFamily="34" charset="0"/>
+        <a:buFont typeface="Arial" panose="020B0604020202090204" pitchFamily="34" charset="0"/>
         <a:buChar char="•"/>
         <a:defRPr sz="2400" kern="1200">
           <a:solidFill>
@@ -3085,7 +2686,7 @@
         <a:spcBef>
           <a:spcPts val="500"/>
         </a:spcBef>
-        <a:buFont typeface="Arial" panose="020B0604020202020204" pitchFamily="34" charset="0"/>
+        <a:buFont typeface="Arial" panose="020B0604020202090204" pitchFamily="34" charset="0"/>
         <a:buChar char="•"/>
         <a:defRPr sz="2000" kern="1200">
           <a:solidFill>
@@ -3103,7 +2704,7 @@
         <a:spcBef>
           <a:spcPts val="500"/>
         </a:spcBef>
-        <a:buFont typeface="Arial" panose="020B0604020202020204" pitchFamily="34" charset="0"/>
+        <a:buFont typeface="Arial" panose="020B0604020202090204" pitchFamily="34" charset="0"/>
         <a:buChar char="•"/>
         <a:defRPr sz="1800" kern="1200">
           <a:solidFill>
@@ -3121,7 +2722,7 @@
         <a:spcBef>
           <a:spcPts val="500"/>
         </a:spcBef>
-        <a:buFont typeface="Arial" panose="020B0604020202020204" pitchFamily="34" charset="0"/>
+        <a:buFont typeface="Arial" panose="020B0604020202090204" pitchFamily="34" charset="0"/>
         <a:buChar char="•"/>
         <a:defRPr sz="1800" kern="1200">
           <a:solidFill>
@@ -3139,7 +2740,7 @@
         <a:spcBef>
           <a:spcPts val="500"/>
         </a:spcBef>
-        <a:buFont typeface="Arial" panose="020B0604020202020204" pitchFamily="34" charset="0"/>
+        <a:buFont typeface="Arial" panose="020B0604020202090204" pitchFamily="34" charset="0"/>
         <a:buChar char="•"/>
         <a:defRPr sz="1800" kern="1200">
           <a:solidFill>
@@ -3157,7 +2758,7 @@
         <a:spcBef>
           <a:spcPts val="500"/>
         </a:spcBef>
-        <a:buFont typeface="Arial" panose="020B0604020202020204" pitchFamily="34" charset="0"/>
+        <a:buFont typeface="Arial" panose="020B0604020202090204" pitchFamily="34" charset="0"/>
         <a:buChar char="•"/>
         <a:defRPr sz="1800" kern="1200">
           <a:solidFill>
@@ -3175,7 +2776,7 @@
         <a:spcBef>
           <a:spcPts val="500"/>
         </a:spcBef>
-        <a:buFont typeface="Arial" panose="020B0604020202020204" pitchFamily="34" charset="0"/>
+        <a:buFont typeface="Arial" panose="020B0604020202090204" pitchFamily="34" charset="0"/>
         <a:buChar char="•"/>
         <a:defRPr sz="1800" kern="1200">
           <a:solidFill>
@@ -3193,7 +2794,7 @@
         <a:spcBef>
           <a:spcPts val="500"/>
         </a:spcBef>
-        <a:buFont typeface="Arial" panose="020B0604020202020204" pitchFamily="34" charset="0"/>
+        <a:buFont typeface="Arial" panose="020B0604020202090204" pitchFamily="34" charset="0"/>
         <a:buChar char="•"/>
         <a:defRPr sz="1800" kern="1200">
           <a:solidFill>
@@ -3323,13 +2924,7 @@
       </p:grpSpPr>
       <p:sp>
         <p:nvSpPr>
-          <p:cNvPr id="131" name="流程图: 可选过程 130">
-            <a:extLst>
-              <a:ext uri="{FF2B5EF4-FFF2-40B4-BE49-F238E27FC236}">
-                <a16:creationId xmlns:a16="http://schemas.microsoft.com/office/drawing/2014/main" id="{52880C41-8725-7775-13FD-65710CACB827}"/>
-              </a:ext>
-            </a:extLst>
-          </p:cNvPr>
+          <p:cNvPr id="131" name="流程图: 可选过程 130"/>
           <p:cNvSpPr/>
           <p:nvPr/>
         </p:nvSpPr>
@@ -3382,13 +2977,7 @@
       </p:sp>
       <p:sp>
         <p:nvSpPr>
-          <p:cNvPr id="8" name="流程图: 可选过程 7">
-            <a:extLst>
-              <a:ext uri="{FF2B5EF4-FFF2-40B4-BE49-F238E27FC236}">
-                <a16:creationId xmlns:a16="http://schemas.microsoft.com/office/drawing/2014/main" id="{D3AF037C-6E50-9B71-0003-2C8E2A2B8CDB}"/>
-              </a:ext>
-            </a:extLst>
-          </p:cNvPr>
+          <p:cNvPr id="8" name="流程图: 可选过程 7"/>
           <p:cNvSpPr/>
           <p:nvPr/>
         </p:nvSpPr>
@@ -3430,8 +3019,8 @@
                 <a:solidFill>
                   <a:schemeClr val="tx1"/>
                 </a:solidFill>
-                <a:latin typeface="Times New Roman" panose="02020603050405020304" pitchFamily="18" charset="0"/>
-                <a:cs typeface="Times New Roman" panose="02020603050405020304" pitchFamily="18" charset="0"/>
+                <a:latin typeface="Times New Roman" panose="02020503050405090304" pitchFamily="18" charset="0"/>
+                <a:cs typeface="Times New Roman" panose="02020503050405090304" pitchFamily="18" charset="0"/>
               </a:rPr>
               <a:t>Input</a:t>
             </a:r>
@@ -3439,23 +3028,16 @@
               <a:solidFill>
                 <a:schemeClr val="tx1"/>
               </a:solidFill>
-              <a:latin typeface="Times New Roman" panose="02020603050405020304" pitchFamily="18" charset="0"/>
-              <a:cs typeface="Times New Roman" panose="02020603050405020304" pitchFamily="18" charset="0"/>
+              <a:latin typeface="Times New Roman" panose="02020503050405090304" pitchFamily="18" charset="0"/>
+              <a:cs typeface="Times New Roman" panose="02020503050405090304" pitchFamily="18" charset="0"/>
             </a:endParaRPr>
           </a:p>
         </p:txBody>
       </p:sp>
       <p:cxnSp>
         <p:nvCxnSpPr>
-          <p:cNvPr id="14" name="直接箭头连接符 13">
-            <a:extLst>
-              <a:ext uri="{FF2B5EF4-FFF2-40B4-BE49-F238E27FC236}">
-                <a16:creationId xmlns:a16="http://schemas.microsoft.com/office/drawing/2014/main" id="{17BBBA86-70D3-C5C6-50C8-9B3F0B90B984}"/>
-              </a:ext>
-            </a:extLst>
-          </p:cNvPr>
+          <p:cNvPr id="14" name="直接箭头连接符 13"/>
           <p:cNvCxnSpPr>
-            <a:cxnSpLocks/>
             <a:endCxn id="19" idx="1"/>
           </p:cNvCxnSpPr>
           <p:nvPr/>
@@ -3489,19 +3071,13 @@
       </p:cxnSp>
       <p:sp>
         <p:nvSpPr>
-          <p:cNvPr id="16" name="文本框 15">
-            <a:extLst>
-              <a:ext uri="{FF2B5EF4-FFF2-40B4-BE49-F238E27FC236}">
-                <a16:creationId xmlns:a16="http://schemas.microsoft.com/office/drawing/2014/main" id="{C4E1156E-2C79-645E-9D66-A98D0589E5FA}"/>
-              </a:ext>
-            </a:extLst>
-          </p:cNvPr>
+          <p:cNvPr id="16" name="文本框 15"/>
           <p:cNvSpPr txBox="1"/>
           <p:nvPr/>
         </p:nvSpPr>
         <p:spPr>
           <a:xfrm>
-            <a:off x="4985357" y="1922531"/>
+            <a:off x="2995267" y="1949201"/>
             <a:ext cx="970137" cy="369332"/>
           </a:xfrm>
           <a:prstGeom prst="rect">
@@ -3517,29 +3093,22 @@
           <a:p>
             <a:r>
               <a:rPr lang="en-US" altLang="zh-CN" b="1">
-                <a:latin typeface="Times New Roman" panose="02020603050405020304" pitchFamily="18" charset="0"/>
-                <a:cs typeface="Times New Roman" panose="02020603050405020304" pitchFamily="18" charset="0"/>
+                <a:latin typeface="Times New Roman" panose="02020503050405090304" pitchFamily="18" charset="0"/>
+                <a:cs typeface="Times New Roman" panose="02020503050405090304" pitchFamily="18" charset="0"/>
               </a:rPr>
               <a:t>Prompt</a:t>
             </a:r>
             <a:endParaRPr lang="zh-CN" altLang="en-US" b="1">
-              <a:latin typeface="Times New Roman" panose="02020603050405020304" pitchFamily="18" charset="0"/>
-              <a:cs typeface="Times New Roman" panose="02020603050405020304" pitchFamily="18" charset="0"/>
+              <a:latin typeface="Times New Roman" panose="02020503050405090304" pitchFamily="18" charset="0"/>
+              <a:cs typeface="Times New Roman" panose="02020503050405090304" pitchFamily="18" charset="0"/>
             </a:endParaRPr>
           </a:p>
         </p:txBody>
       </p:sp>
       <p:cxnSp>
         <p:nvCxnSpPr>
-          <p:cNvPr id="20" name="直接箭头连接符 19">
-            <a:extLst>
-              <a:ext uri="{FF2B5EF4-FFF2-40B4-BE49-F238E27FC236}">
-                <a16:creationId xmlns:a16="http://schemas.microsoft.com/office/drawing/2014/main" id="{A45EFC1A-F5ED-BDD7-772F-7278F61AF1A3}"/>
-              </a:ext>
-            </a:extLst>
-          </p:cNvPr>
+          <p:cNvPr id="20" name="直接箭头连接符 19"/>
           <p:cNvCxnSpPr>
-            <a:cxnSpLocks/>
             <a:stCxn id="8" idx="2"/>
             <a:endCxn id="23" idx="0"/>
           </p:cNvCxnSpPr>
@@ -3574,13 +3143,7 @@
       </p:cxnSp>
       <p:sp>
         <p:nvSpPr>
-          <p:cNvPr id="23" name="流程图: 可选过程 22">
-            <a:extLst>
-              <a:ext uri="{FF2B5EF4-FFF2-40B4-BE49-F238E27FC236}">
-                <a16:creationId xmlns:a16="http://schemas.microsoft.com/office/drawing/2014/main" id="{BD8466F7-A1E5-5D95-2235-8B8F564487F8}"/>
-              </a:ext>
-            </a:extLst>
-          </p:cNvPr>
+          <p:cNvPr id="23" name="流程图: 可选过程 22"/>
           <p:cNvSpPr/>
           <p:nvPr/>
         </p:nvSpPr>
@@ -3625,8 +3188,8 @@
                 <a:solidFill>
                   <a:schemeClr val="tx1"/>
                 </a:solidFill>
-                <a:latin typeface="Times New Roman" panose="02020603050405020304" pitchFamily="18" charset="0"/>
-                <a:cs typeface="Times New Roman" panose="02020603050405020304" pitchFamily="18" charset="0"/>
+                <a:latin typeface="Times New Roman" panose="02020503050405090304" pitchFamily="18" charset="0"/>
+                <a:cs typeface="Times New Roman" panose="02020503050405090304" pitchFamily="18" charset="0"/>
               </a:rPr>
               <a:t>IDS_Query</a:t>
             </a:r>
@@ -3634,21 +3197,15 @@
               <a:solidFill>
                 <a:schemeClr val="tx1"/>
               </a:solidFill>
-              <a:latin typeface="Times New Roman" panose="02020603050405020304" pitchFamily="18" charset="0"/>
-              <a:cs typeface="Times New Roman" panose="02020603050405020304" pitchFamily="18" charset="0"/>
+              <a:latin typeface="Times New Roman" panose="02020503050405090304" pitchFamily="18" charset="0"/>
+              <a:cs typeface="Times New Roman" panose="02020503050405090304" pitchFamily="18" charset="0"/>
             </a:endParaRPr>
           </a:p>
         </p:txBody>
       </p:sp>
       <p:sp>
         <p:nvSpPr>
-          <p:cNvPr id="24" name="文本框 23">
-            <a:extLst>
-              <a:ext uri="{FF2B5EF4-FFF2-40B4-BE49-F238E27FC236}">
-                <a16:creationId xmlns:a16="http://schemas.microsoft.com/office/drawing/2014/main" id="{D1D582D5-201B-EE54-52CD-42CDF6F90844}"/>
-              </a:ext>
-            </a:extLst>
-          </p:cNvPr>
+          <p:cNvPr id="24" name="文本框 23"/>
           <p:cNvSpPr txBox="1"/>
           <p:nvPr/>
         </p:nvSpPr>
@@ -3670,9 +3227,9 @@
           <a:p>
             <a:r>
               <a:rPr lang="en-US" altLang="zh-CN" b="1">
-                <a:latin typeface="Times New Roman" panose="02020603050405020304" pitchFamily="18" charset="0"/>
+                <a:latin typeface="Times New Roman" panose="02020503050405090304" pitchFamily="18" charset="0"/>
                 <a:ea typeface="楷体" panose="02010609060101010101" pitchFamily="49" charset="-122"/>
-                <a:cs typeface="Times New Roman" panose="02020603050405020304" pitchFamily="18" charset="0"/>
+                <a:cs typeface="Times New Roman" panose="02020503050405090304" pitchFamily="18" charset="0"/>
               </a:rPr>
               <a:t>Text</a:t>
             </a:r>
@@ -3680,7 +3237,7 @@
               <a:rPr lang="en-US" altLang="zh-CN">
                 <a:latin typeface="楷体" panose="02010609060101010101" pitchFamily="49" charset="-122"/>
                 <a:ea typeface="楷体" panose="02010609060101010101" pitchFamily="49" charset="-122"/>
-                <a:cs typeface="Times New Roman" panose="02020603050405020304" pitchFamily="18" charset="0"/>
+                <a:cs typeface="Times New Roman" panose="02020503050405090304" pitchFamily="18" charset="0"/>
               </a:rPr>
               <a:t>:</a:t>
             </a:r>
@@ -3688,28 +3245,21 @@
               <a:rPr lang="zh-CN" altLang="en-US">
                 <a:latin typeface="楷体" panose="02010609060101010101" pitchFamily="49" charset="-122"/>
                 <a:ea typeface="楷体" panose="02010609060101010101" pitchFamily="49" charset="-122"/>
-                <a:cs typeface="Times New Roman" panose="02020603050405020304" pitchFamily="18" charset="0"/>
+                <a:cs typeface="Times New Roman" panose="02020503050405090304" pitchFamily="18" charset="0"/>
               </a:rPr>
               <a:t>同济</a:t>
             </a:r>
             <a:endParaRPr lang="zh-CN" altLang="en-US">
               <a:ea typeface="楷体" panose="02010609060101010101" pitchFamily="49" charset="-122"/>
-              <a:cs typeface="Times New Roman" panose="02020603050405020304" pitchFamily="18" charset="0"/>
+              <a:cs typeface="Times New Roman" panose="02020503050405090304" pitchFamily="18" charset="0"/>
             </a:endParaRPr>
           </a:p>
         </p:txBody>
       </p:sp>
       <p:cxnSp>
         <p:nvCxnSpPr>
-          <p:cNvPr id="25" name="直接箭头连接符 24">
-            <a:extLst>
-              <a:ext uri="{FF2B5EF4-FFF2-40B4-BE49-F238E27FC236}">
-                <a16:creationId xmlns:a16="http://schemas.microsoft.com/office/drawing/2014/main" id="{712D75EE-1981-87DD-73A1-411B896BB1D2}"/>
-              </a:ext>
-            </a:extLst>
-          </p:cNvPr>
+          <p:cNvPr id="25" name="直接箭头连接符 24"/>
           <p:cNvCxnSpPr>
-            <a:cxnSpLocks/>
             <a:stCxn id="23" idx="3"/>
             <a:endCxn id="28" idx="1"/>
           </p:cNvCxnSpPr>
@@ -3744,13 +3294,7 @@
       </p:cxnSp>
       <p:sp>
         <p:nvSpPr>
-          <p:cNvPr id="28" name="流程图: 可选过程 27">
-            <a:extLst>
-              <a:ext uri="{FF2B5EF4-FFF2-40B4-BE49-F238E27FC236}">
-                <a16:creationId xmlns:a16="http://schemas.microsoft.com/office/drawing/2014/main" id="{29CD07D0-3B77-C96D-5239-A190D7490CB4}"/>
-              </a:ext>
-            </a:extLst>
-          </p:cNvPr>
+          <p:cNvPr id="28" name="流程图: 可选过程 27"/>
           <p:cNvSpPr/>
           <p:nvPr/>
         </p:nvSpPr>
@@ -3795,8 +3339,8 @@
                 <a:solidFill>
                   <a:schemeClr val="tx1"/>
                 </a:solidFill>
-                <a:latin typeface="Times New Roman" panose="02020603050405020304" pitchFamily="18" charset="0"/>
-                <a:cs typeface="Times New Roman" panose="02020603050405020304" pitchFamily="18" charset="0"/>
+                <a:latin typeface="Times New Roman" panose="02020503050405090304" pitchFamily="18" charset="0"/>
+                <a:cs typeface="Times New Roman" panose="02020503050405090304" pitchFamily="18" charset="0"/>
               </a:rPr>
               <a:t>IDS_Tokenizer</a:t>
             </a:r>
@@ -3804,21 +3348,15 @@
               <a:solidFill>
                 <a:schemeClr val="tx1"/>
               </a:solidFill>
-              <a:latin typeface="Times New Roman" panose="02020603050405020304" pitchFamily="18" charset="0"/>
-              <a:cs typeface="Times New Roman" panose="02020603050405020304" pitchFamily="18" charset="0"/>
+              <a:latin typeface="Times New Roman" panose="02020503050405090304" pitchFamily="18" charset="0"/>
+              <a:cs typeface="Times New Roman" panose="02020503050405090304" pitchFamily="18" charset="0"/>
             </a:endParaRPr>
           </a:p>
         </p:txBody>
       </p:sp>
       <p:sp>
         <p:nvSpPr>
-          <p:cNvPr id="31" name="文本框 30">
-            <a:extLst>
-              <a:ext uri="{FF2B5EF4-FFF2-40B4-BE49-F238E27FC236}">
-                <a16:creationId xmlns:a16="http://schemas.microsoft.com/office/drawing/2014/main" id="{0FAB6B6E-E40E-DE3F-7BB3-D17638D547C4}"/>
-              </a:ext>
-            </a:extLst>
-          </p:cNvPr>
+          <p:cNvPr id="31" name="文本框 30"/>
           <p:cNvSpPr txBox="1"/>
           <p:nvPr/>
         </p:nvSpPr>
@@ -3845,18 +3383,16 @@
               </a:rPr>
               <a:t>⿵冂𠮛⿰氵齐⿻一人⿱𰃮子</a:t>
             </a:r>
-          </a:p>
-        </p:txBody>
-      </p:sp>
-      <p:sp>
-        <p:nvSpPr>
-          <p:cNvPr id="42" name="文本框 41">
-            <a:extLst>
-              <a:ext uri="{FF2B5EF4-FFF2-40B4-BE49-F238E27FC236}">
-                <a16:creationId xmlns:a16="http://schemas.microsoft.com/office/drawing/2014/main" id="{5F0788D9-AF27-3957-8C80-2DABDEC24EDB}"/>
-              </a:ext>
-            </a:extLst>
-          </p:cNvPr>
+            <a:endParaRPr lang="zh-CN" altLang="en-US" sz="1100" b="1">
+              <a:latin typeface="楷体" panose="02010609060101010101" pitchFamily="49" charset="-122"/>
+              <a:ea typeface="楷体" panose="02010609060101010101" pitchFamily="49" charset="-122"/>
+            </a:endParaRPr>
+          </a:p>
+        </p:txBody>
+      </p:sp>
+      <p:sp>
+        <p:nvSpPr>
+          <p:cNvPr id="42" name="文本框 41"/>
           <p:cNvSpPr txBox="1"/>
           <p:nvPr/>
         </p:nvSpPr>
@@ -3885,15 +3421,15 @@
                   <a:srgbClr val="000000"/>
                 </a:solidFill>
                 <a:effectLst/>
-                <a:latin typeface="Times New Roman" panose="02020603050405020304" pitchFamily="18" charset="0"/>
+                <a:latin typeface="Times New Roman" panose="02020503050405090304" pitchFamily="18" charset="0"/>
                 <a:ea typeface="等线" panose="02010600030101010101" pitchFamily="2" charset="-122"/>
-                <a:cs typeface="Times New Roman" panose="02020603050405020304" pitchFamily="18" charset="0"/>
+                <a:cs typeface="Times New Roman" panose="02020503050405090304" pitchFamily="18" charset="0"/>
               </a:rPr>
               <a:t>Input IDs: [1, 10, 7550, 30628, …. 0, 0] </a:t>
             </a:r>
             <a:endParaRPr lang="en-US" altLang="zh-CN" sz="1000" b="1">
-              <a:latin typeface="Times New Roman" panose="02020603050405020304" pitchFamily="18" charset="0"/>
-              <a:cs typeface="Times New Roman" panose="02020603050405020304" pitchFamily="18" charset="0"/>
+              <a:latin typeface="Times New Roman" panose="02020503050405090304" pitchFamily="18" charset="0"/>
+              <a:cs typeface="Times New Roman" panose="02020503050405090304" pitchFamily="18" charset="0"/>
             </a:endParaRPr>
           </a:p>
           <a:p>
@@ -3906,15 +3442,15 @@
                   <a:srgbClr val="000000"/>
                 </a:solidFill>
                 <a:effectLst/>
-                <a:latin typeface="Times New Roman" panose="02020603050405020304" pitchFamily="18" charset="0"/>
+                <a:latin typeface="Times New Roman" panose="02020503050405090304" pitchFamily="18" charset="0"/>
                 <a:ea typeface="等线" panose="02010600030101010101" pitchFamily="2" charset="-122"/>
-                <a:cs typeface="Times New Roman" panose="02020603050405020304" pitchFamily="18" charset="0"/>
+                <a:cs typeface="Times New Roman" panose="02020503050405090304" pitchFamily="18" charset="0"/>
               </a:rPr>
               <a:t>Attention Mask: [1, 0, 0, 0, 0, 0, 0, …..0, 0] </a:t>
             </a:r>
             <a:endParaRPr lang="en-US" altLang="zh-CN" sz="1000" b="1">
-              <a:latin typeface="Times New Roman" panose="02020603050405020304" pitchFamily="18" charset="0"/>
-              <a:cs typeface="Times New Roman" panose="02020603050405020304" pitchFamily="18" charset="0"/>
+              <a:latin typeface="Times New Roman" panose="02020503050405090304" pitchFamily="18" charset="0"/>
+              <a:cs typeface="Times New Roman" panose="02020503050405090304" pitchFamily="18" charset="0"/>
             </a:endParaRPr>
           </a:p>
           <a:p>
@@ -3927,30 +3463,23 @@
                   <a:srgbClr val="000000"/>
                 </a:solidFill>
                 <a:effectLst/>
-                <a:latin typeface="Times New Roman" panose="02020603050405020304" pitchFamily="18" charset="0"/>
+                <a:latin typeface="Times New Roman" panose="02020503050405090304" pitchFamily="18" charset="0"/>
                 <a:ea typeface="等线" panose="02010600030101010101" pitchFamily="2" charset="-122"/>
-                <a:cs typeface="Times New Roman" panose="02020603050405020304" pitchFamily="18" charset="0"/>
+                <a:cs typeface="Times New Roman" panose="02020503050405090304" pitchFamily="18" charset="0"/>
               </a:rPr>
               <a:t>Token Types: [0, 0, 0, 0, 0, 0, 0,….. 0, 0]</a:t>
             </a:r>
             <a:endParaRPr lang="zh-CN" altLang="en-US" sz="1000" b="1">
-              <a:latin typeface="Times New Roman" panose="02020603050405020304" pitchFamily="18" charset="0"/>
-              <a:cs typeface="Times New Roman" panose="02020603050405020304" pitchFamily="18" charset="0"/>
+              <a:latin typeface="Times New Roman" panose="02020503050405090304" pitchFamily="18" charset="0"/>
+              <a:cs typeface="Times New Roman" panose="02020503050405090304" pitchFamily="18" charset="0"/>
             </a:endParaRPr>
           </a:p>
         </p:txBody>
       </p:sp>
       <p:cxnSp>
         <p:nvCxnSpPr>
-          <p:cNvPr id="43" name="直接箭头连接符 42">
-            <a:extLst>
-              <a:ext uri="{FF2B5EF4-FFF2-40B4-BE49-F238E27FC236}">
-                <a16:creationId xmlns:a16="http://schemas.microsoft.com/office/drawing/2014/main" id="{5217AEB1-7DE6-85B8-FBF7-5F1F30372DB4}"/>
-              </a:ext>
-            </a:extLst>
-          </p:cNvPr>
+          <p:cNvPr id="43" name="直接箭头连接符 42"/>
           <p:cNvCxnSpPr>
-            <a:cxnSpLocks/>
             <a:stCxn id="28" idx="3"/>
             <a:endCxn id="46" idx="1"/>
           </p:cNvCxnSpPr>
@@ -3985,13 +3514,7 @@
       </p:cxnSp>
       <p:sp>
         <p:nvSpPr>
-          <p:cNvPr id="46" name="流程图: 可选过程 45">
-            <a:extLst>
-              <a:ext uri="{FF2B5EF4-FFF2-40B4-BE49-F238E27FC236}">
-                <a16:creationId xmlns:a16="http://schemas.microsoft.com/office/drawing/2014/main" id="{182CB8EB-BE56-8B2A-93EB-92465734296F}"/>
-              </a:ext>
-            </a:extLst>
-          </p:cNvPr>
+          <p:cNvPr id="46" name="流程图: 可选过程 45"/>
           <p:cNvSpPr/>
           <p:nvPr/>
         </p:nvSpPr>
@@ -4036,8 +3559,8 @@
                 <a:solidFill>
                   <a:schemeClr val="tx1"/>
                 </a:solidFill>
-                <a:latin typeface="Times New Roman" panose="02020603050405020304" pitchFamily="18" charset="0"/>
-                <a:cs typeface="Times New Roman" panose="02020603050405020304" pitchFamily="18" charset="0"/>
+                <a:latin typeface="Times New Roman" panose="02020503050405090304" pitchFamily="18" charset="0"/>
+                <a:cs typeface="Times New Roman" panose="02020503050405090304" pitchFamily="18" charset="0"/>
               </a:rPr>
               <a:t>IDS_Embedder</a:t>
             </a:r>
@@ -4045,24 +3568,16 @@
               <a:solidFill>
                 <a:schemeClr val="tx1"/>
               </a:solidFill>
-              <a:latin typeface="Times New Roman" panose="02020603050405020304" pitchFamily="18" charset="0"/>
-              <a:cs typeface="Times New Roman" panose="02020603050405020304" pitchFamily="18" charset="0"/>
+              <a:latin typeface="Times New Roman" panose="02020503050405090304" pitchFamily="18" charset="0"/>
+              <a:cs typeface="Times New Roman" panose="02020503050405090304" pitchFamily="18" charset="0"/>
             </a:endParaRPr>
           </a:p>
         </p:txBody>
       </p:sp>
       <p:cxnSp>
         <p:nvCxnSpPr>
-          <p:cNvPr id="51" name="直接箭头连接符 50">
-            <a:extLst>
-              <a:ext uri="{FF2B5EF4-FFF2-40B4-BE49-F238E27FC236}">
-                <a16:creationId xmlns:a16="http://schemas.microsoft.com/office/drawing/2014/main" id="{33DF20F2-F85D-A909-0FFC-4DAB712A5714}"/>
-              </a:ext>
-            </a:extLst>
-          </p:cNvPr>
-          <p:cNvCxnSpPr>
-            <a:cxnSpLocks/>
-          </p:cNvCxnSpPr>
+          <p:cNvPr id="51" name="直接箭头连接符 50"/>
+          <p:cNvCxnSpPr/>
           <p:nvPr/>
         </p:nvCxnSpPr>
         <p:spPr>
@@ -4094,13 +3609,7 @@
       </p:cxnSp>
       <p:sp>
         <p:nvSpPr>
-          <p:cNvPr id="52" name="流程图: 可选过程 51">
-            <a:extLst>
-              <a:ext uri="{FF2B5EF4-FFF2-40B4-BE49-F238E27FC236}">
-                <a16:creationId xmlns:a16="http://schemas.microsoft.com/office/drawing/2014/main" id="{18574A7E-62BB-26D7-1847-4BDD2B059CD5}"/>
-              </a:ext>
-            </a:extLst>
-          </p:cNvPr>
+          <p:cNvPr id="52" name="流程图: 可选过程 51"/>
           <p:cNvSpPr/>
           <p:nvPr/>
         </p:nvSpPr>
@@ -4142,8 +3651,8 @@
                 <a:solidFill>
                   <a:schemeClr val="tx1"/>
                 </a:solidFill>
-                <a:latin typeface="Times New Roman" panose="02020603050405020304" pitchFamily="18" charset="0"/>
-                <a:cs typeface="Times New Roman" panose="02020603050405020304" pitchFamily="18" charset="0"/>
+                <a:latin typeface="Times New Roman" panose="02020503050405090304" pitchFamily="18" charset="0"/>
+                <a:cs typeface="Times New Roman" panose="02020503050405090304" pitchFamily="18" charset="0"/>
               </a:rPr>
               <a:t>Attention Layer</a:t>
             </a:r>
@@ -4151,21 +3660,15 @@
               <a:solidFill>
                 <a:schemeClr val="tx1"/>
               </a:solidFill>
-              <a:latin typeface="Times New Roman" panose="02020603050405020304" pitchFamily="18" charset="0"/>
-              <a:cs typeface="Times New Roman" panose="02020603050405020304" pitchFamily="18" charset="0"/>
+              <a:latin typeface="Times New Roman" panose="02020503050405090304" pitchFamily="18" charset="0"/>
+              <a:cs typeface="Times New Roman" panose="02020503050405090304" pitchFamily="18" charset="0"/>
             </a:endParaRPr>
           </a:p>
         </p:txBody>
       </p:sp>
       <p:cxnSp>
         <p:nvCxnSpPr>
-          <p:cNvPr id="84" name="连接符: 肘形 83">
-            <a:extLst>
-              <a:ext uri="{FF2B5EF4-FFF2-40B4-BE49-F238E27FC236}">
-                <a16:creationId xmlns:a16="http://schemas.microsoft.com/office/drawing/2014/main" id="{70EA355C-F716-5785-BCC1-4A79A5F80AF1}"/>
-              </a:ext>
-            </a:extLst>
-          </p:cNvPr>
+          <p:cNvPr id="84" name="连接符: 肘形 83"/>
           <p:cNvCxnSpPr>
             <a:stCxn id="8" idx="1"/>
           </p:cNvCxnSpPr>
@@ -4197,16 +3700,8 @@
       </p:cxnSp>
       <p:cxnSp>
         <p:nvCxnSpPr>
-          <p:cNvPr id="94" name="直接连接符 93">
-            <a:extLst>
-              <a:ext uri="{FF2B5EF4-FFF2-40B4-BE49-F238E27FC236}">
-                <a16:creationId xmlns:a16="http://schemas.microsoft.com/office/drawing/2014/main" id="{B0C907E6-8FEB-A04E-A8F1-71F4DD2E452D}"/>
-              </a:ext>
-            </a:extLst>
-          </p:cNvPr>
-          <p:cNvCxnSpPr>
-            <a:cxnSpLocks/>
-          </p:cNvCxnSpPr>
+          <p:cNvPr id="94" name="直接连接符 93"/>
+          <p:cNvCxnSpPr/>
           <p:nvPr/>
         </p:nvCxnSpPr>
         <p:spPr>
@@ -4235,16 +3730,8 @@
       </p:cxnSp>
       <p:cxnSp>
         <p:nvCxnSpPr>
-          <p:cNvPr id="96" name="直接箭头连接符 95">
-            <a:extLst>
-              <a:ext uri="{FF2B5EF4-FFF2-40B4-BE49-F238E27FC236}">
-                <a16:creationId xmlns:a16="http://schemas.microsoft.com/office/drawing/2014/main" id="{473E9F9F-6DD9-3727-6AEC-ECA56808D7B7}"/>
-              </a:ext>
-            </a:extLst>
-          </p:cNvPr>
-          <p:cNvCxnSpPr>
-            <a:cxnSpLocks/>
-          </p:cNvCxnSpPr>
+          <p:cNvPr id="96" name="直接箭头连接符 95"/>
+          <p:cNvCxnSpPr/>
           <p:nvPr/>
         </p:nvCxnSpPr>
         <p:spPr>
@@ -4276,13 +3763,7 @@
       </p:cxnSp>
       <p:sp>
         <p:nvSpPr>
-          <p:cNvPr id="105" name="文本框 104">
-            <a:extLst>
-              <a:ext uri="{FF2B5EF4-FFF2-40B4-BE49-F238E27FC236}">
-                <a16:creationId xmlns:a16="http://schemas.microsoft.com/office/drawing/2014/main" id="{BDD3CA54-5E5C-04AA-E1D9-9AC6655D7581}"/>
-              </a:ext>
-            </a:extLst>
-          </p:cNvPr>
+          <p:cNvPr id="105" name="文本框 104"/>
           <p:cNvSpPr txBox="1"/>
           <p:nvPr/>
         </p:nvSpPr>
@@ -4304,30 +3785,22 @@
           <a:p>
             <a:r>
               <a:rPr lang="en-US" altLang="zh-CN" b="1">
-                <a:latin typeface="Times New Roman" panose="02020603050405020304" pitchFamily="18" charset="0"/>
-                <a:cs typeface="Times New Roman" panose="02020603050405020304" pitchFamily="18" charset="0"/>
+                <a:latin typeface="Times New Roman" panose="02020503050405090304" pitchFamily="18" charset="0"/>
+                <a:cs typeface="Times New Roman" panose="02020503050405090304" pitchFamily="18" charset="0"/>
               </a:rPr>
               <a:t>Position</a:t>
             </a:r>
             <a:endParaRPr lang="zh-CN" altLang="en-US" b="1">
-              <a:latin typeface="Times New Roman" panose="02020603050405020304" pitchFamily="18" charset="0"/>
-              <a:cs typeface="Times New Roman" panose="02020603050405020304" pitchFamily="18" charset="0"/>
+              <a:latin typeface="Times New Roman" panose="02020503050405090304" pitchFamily="18" charset="0"/>
+              <a:cs typeface="Times New Roman" panose="02020503050405090304" pitchFamily="18" charset="0"/>
             </a:endParaRPr>
           </a:p>
         </p:txBody>
       </p:sp>
       <p:cxnSp>
         <p:nvCxnSpPr>
-          <p:cNvPr id="106" name="直接箭头连接符 105">
-            <a:extLst>
-              <a:ext uri="{FF2B5EF4-FFF2-40B4-BE49-F238E27FC236}">
-                <a16:creationId xmlns:a16="http://schemas.microsoft.com/office/drawing/2014/main" id="{D31D21C2-DF0B-3A94-CF61-92CB41676405}"/>
-              </a:ext>
-            </a:extLst>
-          </p:cNvPr>
-          <p:cNvCxnSpPr>
-            <a:cxnSpLocks/>
-          </p:cNvCxnSpPr>
+          <p:cNvPr id="106" name="直接箭头连接符 105"/>
+          <p:cNvCxnSpPr/>
           <p:nvPr/>
         </p:nvCxnSpPr>
         <p:spPr>
@@ -4359,13 +3832,7 @@
       </p:cxnSp>
       <p:sp>
         <p:nvSpPr>
-          <p:cNvPr id="110" name="流程图: 可选过程 109">
-            <a:extLst>
-              <a:ext uri="{FF2B5EF4-FFF2-40B4-BE49-F238E27FC236}">
-                <a16:creationId xmlns:a16="http://schemas.microsoft.com/office/drawing/2014/main" id="{0DFB9335-E509-FDA3-F4B8-F8F1BBE5B9F8}"/>
-              </a:ext>
-            </a:extLst>
-          </p:cNvPr>
+          <p:cNvPr id="110" name="流程图: 可选过程 109"/>
           <p:cNvSpPr/>
           <p:nvPr/>
         </p:nvSpPr>
@@ -4410,8 +3877,8 @@
                 <a:solidFill>
                   <a:schemeClr val="tx1"/>
                 </a:solidFill>
-                <a:latin typeface="Times New Roman" panose="02020603050405020304" pitchFamily="18" charset="0"/>
-                <a:cs typeface="Times New Roman" panose="02020603050405020304" pitchFamily="18" charset="0"/>
+                <a:latin typeface="Times New Roman" panose="02020503050405090304" pitchFamily="18" charset="0"/>
+                <a:cs typeface="Times New Roman" panose="02020503050405090304" pitchFamily="18" charset="0"/>
               </a:rPr>
               <a:t>TextRenderNet</a:t>
             </a:r>
@@ -4419,21 +3886,15 @@
               <a:solidFill>
                 <a:schemeClr val="tx1"/>
               </a:solidFill>
-              <a:latin typeface="Times New Roman" panose="02020603050405020304" pitchFamily="18" charset="0"/>
-              <a:cs typeface="Times New Roman" panose="02020603050405020304" pitchFamily="18" charset="0"/>
+              <a:latin typeface="Times New Roman" panose="02020503050405090304" pitchFamily="18" charset="0"/>
+              <a:cs typeface="Times New Roman" panose="02020503050405090304" pitchFamily="18" charset="0"/>
             </a:endParaRPr>
           </a:p>
         </p:txBody>
       </p:sp>
       <p:sp>
         <p:nvSpPr>
-          <p:cNvPr id="19" name="流程图: 可选过程 18">
-            <a:extLst>
-              <a:ext uri="{FF2B5EF4-FFF2-40B4-BE49-F238E27FC236}">
-                <a16:creationId xmlns:a16="http://schemas.microsoft.com/office/drawing/2014/main" id="{C4B8CCED-F328-3D9B-AC06-74AFAD4F1EEC}"/>
-              </a:ext>
-            </a:extLst>
-          </p:cNvPr>
+          <p:cNvPr id="19" name="流程图: 可选过程 18"/>
           <p:cNvSpPr/>
           <p:nvPr/>
         </p:nvSpPr>
@@ -4478,8 +3939,8 @@
                 <a:solidFill>
                   <a:schemeClr val="tx1"/>
                 </a:solidFill>
-                <a:latin typeface="Times New Roman" panose="02020603050405020304" pitchFamily="18" charset="0"/>
-                <a:cs typeface="Times New Roman" panose="02020603050405020304" pitchFamily="18" charset="0"/>
+                <a:latin typeface="Times New Roman" panose="02020503050405090304" pitchFamily="18" charset="0"/>
+                <a:cs typeface="Times New Roman" panose="02020503050405090304" pitchFamily="18" charset="0"/>
               </a:rPr>
               <a:t>SceneGenNet</a:t>
             </a:r>
@@ -4487,24 +3948,16 @@
               <a:solidFill>
                 <a:schemeClr val="tx1"/>
               </a:solidFill>
-              <a:latin typeface="Times New Roman" panose="02020603050405020304" pitchFamily="18" charset="0"/>
-              <a:cs typeface="Times New Roman" panose="02020603050405020304" pitchFamily="18" charset="0"/>
+              <a:latin typeface="Times New Roman" panose="02020503050405090304" pitchFamily="18" charset="0"/>
+              <a:cs typeface="Times New Roman" panose="02020503050405090304" pitchFamily="18" charset="0"/>
             </a:endParaRPr>
           </a:p>
         </p:txBody>
       </p:sp>
       <p:cxnSp>
         <p:nvCxnSpPr>
-          <p:cNvPr id="141" name="直接箭头连接符 140">
-            <a:extLst>
-              <a:ext uri="{FF2B5EF4-FFF2-40B4-BE49-F238E27FC236}">
-                <a16:creationId xmlns:a16="http://schemas.microsoft.com/office/drawing/2014/main" id="{7A93C661-1FFA-F88E-6046-DBC4A16E7C70}"/>
-              </a:ext>
-            </a:extLst>
-          </p:cNvPr>
-          <p:cNvCxnSpPr>
-            <a:cxnSpLocks/>
-          </p:cNvCxnSpPr>
+          <p:cNvPr id="141" name="直接箭头连接符 140"/>
+          <p:cNvCxnSpPr/>
           <p:nvPr/>
         </p:nvCxnSpPr>
         <p:spPr>
@@ -4536,13 +3989,7 @@
       </p:cxnSp>
       <p:sp>
         <p:nvSpPr>
-          <p:cNvPr id="142" name="流程图: 可选过程 141">
-            <a:extLst>
-              <a:ext uri="{FF2B5EF4-FFF2-40B4-BE49-F238E27FC236}">
-                <a16:creationId xmlns:a16="http://schemas.microsoft.com/office/drawing/2014/main" id="{28396F8E-2381-0531-06FF-1C7DFCF54301}"/>
-              </a:ext>
-            </a:extLst>
-          </p:cNvPr>
+          <p:cNvPr id="142" name="流程图: 可选过程 141"/>
           <p:cNvSpPr/>
           <p:nvPr/>
         </p:nvSpPr>
@@ -4584,31 +4031,982 @@
             <a:pPr algn="ctr"/>
             <a:r>
               <a:rPr lang="en-US" altLang="zh-CN" b="1">
-                <a:latin typeface="Times New Roman" panose="02020603050405020304" pitchFamily="18" charset="0"/>
-                <a:cs typeface="Times New Roman" panose="02020603050405020304" pitchFamily="18" charset="0"/>
+                <a:latin typeface="Times New Roman" panose="02020503050405090304" pitchFamily="18" charset="0"/>
+                <a:cs typeface="Times New Roman" panose="02020503050405090304" pitchFamily="18" charset="0"/>
               </a:rPr>
               <a:t>Sd3 </a:t>
             </a:r>
             <a:r>
               <a:rPr lang="en-US" altLang="zh-CN" b="1" err="1">
-                <a:latin typeface="Times New Roman" panose="02020603050405020304" pitchFamily="18" charset="0"/>
-                <a:cs typeface="Times New Roman" panose="02020603050405020304" pitchFamily="18" charset="0"/>
+                <a:latin typeface="Times New Roman" panose="02020503050405090304" pitchFamily="18" charset="0"/>
+                <a:cs typeface="Times New Roman" panose="02020503050405090304" pitchFamily="18" charset="0"/>
               </a:rPr>
               <a:t>pipelinne</a:t>
             </a:r>
             <a:endParaRPr lang="zh-CN" altLang="en-US" b="1">
-              <a:latin typeface="Times New Roman" panose="02020603050405020304" pitchFamily="18" charset="0"/>
-              <a:cs typeface="Times New Roman" panose="02020603050405020304" pitchFamily="18" charset="0"/>
+              <a:latin typeface="Times New Roman" panose="02020503050405090304" pitchFamily="18" charset="0"/>
+              <a:cs typeface="Times New Roman" panose="02020503050405090304" pitchFamily="18" charset="0"/>
             </a:endParaRPr>
           </a:p>
         </p:txBody>
       </p:sp>
+      <p:sp>
+        <p:nvSpPr>
+          <p:cNvPr id="3" name="流程图: 可选过程 2"/>
+          <p:cNvSpPr/>
+          <p:nvPr/>
+        </p:nvSpPr>
+        <p:spPr>
+          <a:xfrm>
+            <a:off x="4391016" y="1983959"/>
+            <a:ext cx="1459281" cy="575023"/>
+          </a:xfrm>
+          <a:prstGeom prst="flowChartAlternateProcess">
+            <a:avLst/>
+          </a:prstGeom>
+          <a:solidFill>
+            <a:schemeClr val="accent4">
+              <a:lumMod val="60000"/>
+              <a:lumOff val="40000"/>
+            </a:schemeClr>
+          </a:solidFill>
+        </p:spPr>
+        <p:style>
+          <a:lnRef idx="2">
+            <a:schemeClr val="accent1">
+              <a:shade val="15000"/>
+            </a:schemeClr>
+          </a:lnRef>
+          <a:fillRef idx="1">
+            <a:schemeClr val="accent1"/>
+          </a:fillRef>
+          <a:effectRef idx="0">
+            <a:schemeClr val="accent1"/>
+          </a:effectRef>
+          <a:fontRef idx="minor">
+            <a:schemeClr val="lt1"/>
+          </a:fontRef>
+        </p:style>
+        <p:txBody>
+          <a:bodyPr rtlCol="0" anchor="ctr"/>
+          <a:lstStyle/>
+          <a:p>
+            <a:pPr algn="ctr"/>
+            <a:r>
+              <a:rPr lang="en-US" altLang="zh-CN" sz="1400" b="1">
+                <a:solidFill>
+                  <a:schemeClr val="tx1"/>
+                </a:solidFill>
+                <a:latin typeface="Times New Roman" panose="02020503050405090304" pitchFamily="18" charset="0"/>
+                <a:cs typeface="Times New Roman" panose="02020503050405090304" pitchFamily="18" charset="0"/>
+              </a:rPr>
+              <a:t>CLIP+T5</a:t>
+            </a:r>
+            <a:endParaRPr lang="en-US" altLang="zh-CN" sz="1400" b="1">
+              <a:solidFill>
+                <a:schemeClr val="tx1"/>
+              </a:solidFill>
+              <a:latin typeface="Times New Roman" panose="02020503050405090304" pitchFamily="18" charset="0"/>
+              <a:cs typeface="Times New Roman" panose="02020503050405090304" pitchFamily="18" charset="0"/>
+            </a:endParaRPr>
+          </a:p>
+        </p:txBody>
+      </p:sp>
     </p:spTree>
-    <p:extLst>
-      <p:ext uri="{BB962C8B-B14F-4D97-AF65-F5344CB8AC3E}">
-        <p14:creationId xmlns:p14="http://schemas.microsoft.com/office/powerpoint/2010/main" val="1279187953"/>
-      </p:ext>
-    </p:extLst>
+  </p:cSld>
+  <p:clrMapOvr>
+    <a:masterClrMapping/>
+  </p:clrMapOvr>
+</p:sld>
+</file>
+
+<file path=ppt/slides/slide2.xml><?xml version="1.0" encoding="utf-8"?>
+<p:sld xmlns:a="http://schemas.openxmlformats.org/drawingml/2006/main" xmlns:r="http://schemas.openxmlformats.org/officeDocument/2006/relationships" xmlns:p="http://schemas.openxmlformats.org/presentationml/2006/main">
+  <p:cSld>
+    <p:spTree>
+      <p:nvGrpSpPr>
+        <p:cNvPr id="1" name=""/>
+        <p:cNvGrpSpPr/>
+        <p:nvPr/>
+      </p:nvGrpSpPr>
+      <p:grpSpPr/>
+      <p:sp>
+        <p:nvSpPr>
+          <p:cNvPr id="46" name="流程图: 可选过程 45"/>
+          <p:cNvSpPr/>
+          <p:nvPr/>
+        </p:nvSpPr>
+        <p:spPr>
+          <a:xfrm>
+            <a:off x="756285" y="2618740"/>
+            <a:ext cx="2106930" cy="553085"/>
+          </a:xfrm>
+          <a:prstGeom prst="flowChartAlternateProcess">
+            <a:avLst/>
+          </a:prstGeom>
+          <a:solidFill>
+            <a:schemeClr val="accent4">
+              <a:lumMod val="60000"/>
+              <a:lumOff val="40000"/>
+            </a:schemeClr>
+          </a:solidFill>
+        </p:spPr>
+        <p:style>
+          <a:lnRef idx="2">
+            <a:schemeClr val="accent1">
+              <a:shade val="15000"/>
+            </a:schemeClr>
+          </a:lnRef>
+          <a:fillRef idx="1">
+            <a:schemeClr val="accent1"/>
+          </a:fillRef>
+          <a:effectRef idx="0">
+            <a:schemeClr val="accent1"/>
+          </a:effectRef>
+          <a:fontRef idx="minor">
+            <a:schemeClr val="lt1"/>
+          </a:fontRef>
+        </p:style>
+        <p:txBody>
+          <a:bodyPr rtlCol="0" anchor="ctr"/>
+          <a:lstStyle/>
+          <a:p>
+            <a:pPr algn="ctr"/>
+            <a:r>
+              <a:rPr lang="en-US" altLang="zh-CN" sz="1400" b="1">
+                <a:solidFill>
+                  <a:schemeClr val="tx1"/>
+                </a:solidFill>
+                <a:latin typeface="Times New Roman" panose="02020503050405090304" pitchFamily="18" charset="0"/>
+                <a:cs typeface="Times New Roman" panose="02020503050405090304" pitchFamily="18" charset="0"/>
+              </a:rPr>
+              <a:t>IDS_Embeddings</a:t>
+            </a:r>
+            <a:endParaRPr lang="zh-CN" altLang="en-US" sz="1400" b="1">
+              <a:solidFill>
+                <a:schemeClr val="tx1"/>
+              </a:solidFill>
+              <a:latin typeface="Times New Roman" panose="02020503050405090304" pitchFamily="18" charset="0"/>
+              <a:cs typeface="Times New Roman" panose="02020503050405090304" pitchFamily="18" charset="0"/>
+            </a:endParaRPr>
+          </a:p>
+        </p:txBody>
+      </p:sp>
+      <p:sp>
+        <p:nvSpPr>
+          <p:cNvPr id="3" name="流程图: 可选过程 2"/>
+          <p:cNvSpPr/>
+          <p:nvPr/>
+        </p:nvSpPr>
+        <p:spPr>
+          <a:xfrm>
+            <a:off x="2451613" y="4322947"/>
+            <a:ext cx="1459279" cy="552863"/>
+          </a:xfrm>
+          <a:prstGeom prst="flowChartAlternateProcess">
+            <a:avLst/>
+          </a:prstGeom>
+          <a:solidFill>
+            <a:schemeClr val="accent4">
+              <a:lumMod val="60000"/>
+              <a:lumOff val="40000"/>
+            </a:schemeClr>
+          </a:solidFill>
+        </p:spPr>
+        <p:style>
+          <a:lnRef idx="2">
+            <a:schemeClr val="accent1">
+              <a:shade val="15000"/>
+            </a:schemeClr>
+          </a:lnRef>
+          <a:fillRef idx="1">
+            <a:schemeClr val="accent1"/>
+          </a:fillRef>
+          <a:effectRef idx="0">
+            <a:schemeClr val="accent1"/>
+          </a:effectRef>
+          <a:fontRef idx="minor">
+            <a:schemeClr val="lt1"/>
+          </a:fontRef>
+        </p:style>
+        <p:txBody>
+          <a:bodyPr rtlCol="0" anchor="ctr"/>
+          <a:lstStyle/>
+          <a:p>
+            <a:pPr algn="ctr"/>
+            <a:r>
+              <a:rPr lang="en-US" altLang="zh-CN" sz="1400" b="1">
+                <a:solidFill>
+                  <a:schemeClr val="tx1"/>
+                </a:solidFill>
+                <a:latin typeface="Times New Roman" panose="02020503050405090304" pitchFamily="18" charset="0"/>
+                <a:cs typeface="Times New Roman" panose="02020503050405090304" pitchFamily="18" charset="0"/>
+              </a:rPr>
+              <a:t>Pre-Trained Embeddings</a:t>
+            </a:r>
+            <a:endParaRPr lang="en-US" altLang="zh-CN" sz="1400" b="1">
+              <a:solidFill>
+                <a:schemeClr val="tx1"/>
+              </a:solidFill>
+              <a:latin typeface="Times New Roman" panose="02020503050405090304" pitchFamily="18" charset="0"/>
+              <a:cs typeface="Times New Roman" panose="02020503050405090304" pitchFamily="18" charset="0"/>
+            </a:endParaRPr>
+          </a:p>
+        </p:txBody>
+      </p:sp>
+      <p:cxnSp>
+        <p:nvCxnSpPr>
+          <p:cNvPr id="20" name="直接箭头连接符 19"/>
+          <p:cNvCxnSpPr/>
+          <p:nvPr/>
+        </p:nvCxnSpPr>
+        <p:spPr>
+          <a:xfrm>
+            <a:off x="2863223" y="2895253"/>
+            <a:ext cx="2033270" cy="0"/>
+          </a:xfrm>
+          <a:prstGeom prst="straightConnector1">
+            <a:avLst/>
+          </a:prstGeom>
+          <a:ln>
+            <a:tailEnd type="triangle"/>
+          </a:ln>
+        </p:spPr>
+        <p:style>
+          <a:lnRef idx="3">
+            <a:schemeClr val="dk1"/>
+          </a:lnRef>
+          <a:fillRef idx="0">
+            <a:schemeClr val="dk1"/>
+          </a:fillRef>
+          <a:effectRef idx="2">
+            <a:schemeClr val="dk1"/>
+          </a:effectRef>
+          <a:fontRef idx="minor">
+            <a:schemeClr val="tx1"/>
+          </a:fontRef>
+        </p:style>
+      </p:cxnSp>
+      <p:cxnSp>
+        <p:nvCxnSpPr>
+          <p:cNvPr id="94" name="直接连接符 93"/>
+          <p:cNvCxnSpPr/>
+          <p:nvPr/>
+        </p:nvCxnSpPr>
+        <p:spPr>
+          <a:xfrm>
+            <a:off x="3910913" y="4599027"/>
+            <a:ext cx="1504950" cy="0"/>
+          </a:xfrm>
+          <a:prstGeom prst="line">
+            <a:avLst/>
+          </a:prstGeom>
+        </p:spPr>
+        <p:style>
+          <a:lnRef idx="3">
+            <a:schemeClr val="accent1"/>
+          </a:lnRef>
+          <a:fillRef idx="0">
+            <a:schemeClr val="accent1"/>
+          </a:fillRef>
+          <a:effectRef idx="2">
+            <a:schemeClr val="accent1"/>
+          </a:effectRef>
+          <a:fontRef idx="minor">
+            <a:schemeClr val="tx1"/>
+          </a:fontRef>
+        </p:style>
+      </p:cxnSp>
+      <p:cxnSp>
+        <p:nvCxnSpPr>
+          <p:cNvPr id="96" name="直接箭头连接符 95"/>
+          <p:cNvCxnSpPr/>
+          <p:nvPr/>
+        </p:nvCxnSpPr>
+        <p:spPr>
+          <a:xfrm flipV="1">
+            <a:off x="5422813" y="3418883"/>
+            <a:ext cx="0" cy="1180465"/>
+          </a:xfrm>
+          <a:prstGeom prst="straightConnector1">
+            <a:avLst/>
+          </a:prstGeom>
+          <a:ln>
+            <a:tailEnd type="triangle"/>
+          </a:ln>
+        </p:spPr>
+        <p:style>
+          <a:lnRef idx="3">
+            <a:schemeClr val="accent1"/>
+          </a:lnRef>
+          <a:fillRef idx="0">
+            <a:schemeClr val="accent1"/>
+          </a:fillRef>
+          <a:effectRef idx="2">
+            <a:schemeClr val="accent1"/>
+          </a:effectRef>
+          <a:fontRef idx="minor">
+            <a:schemeClr val="tx1"/>
+          </a:fontRef>
+        </p:style>
+      </p:cxnSp>
+      <p:sp>
+        <p:nvSpPr>
+          <p:cNvPr id="5" name="流程图: 可选过程 4"/>
+          <p:cNvSpPr/>
+          <p:nvPr/>
+        </p:nvSpPr>
+        <p:spPr>
+          <a:xfrm>
+            <a:off x="4896485" y="2413000"/>
+            <a:ext cx="1123315" cy="963295"/>
+          </a:xfrm>
+          <a:prstGeom prst="flowChartAlternateProcess">
+            <a:avLst/>
+          </a:prstGeom>
+          <a:solidFill>
+            <a:schemeClr val="accent4">
+              <a:lumMod val="60000"/>
+              <a:lumOff val="40000"/>
+            </a:schemeClr>
+          </a:solidFill>
+        </p:spPr>
+        <p:style>
+          <a:lnRef idx="2">
+            <a:schemeClr val="accent1">
+              <a:shade val="15000"/>
+            </a:schemeClr>
+          </a:lnRef>
+          <a:fillRef idx="1">
+            <a:schemeClr val="accent1"/>
+          </a:fillRef>
+          <a:effectRef idx="0">
+            <a:schemeClr val="accent1"/>
+          </a:effectRef>
+          <a:fontRef idx="minor">
+            <a:schemeClr val="lt1"/>
+          </a:fontRef>
+        </p:style>
+        <p:txBody>
+          <a:bodyPr rtlCol="0" anchor="ctr"/>
+          <a:lstStyle/>
+          <a:p>
+            <a:pPr algn="ctr"/>
+            <a:r>
+              <a:rPr lang="en-US" altLang="zh-CN" sz="1400" b="1">
+                <a:solidFill>
+                  <a:schemeClr val="tx1"/>
+                </a:solidFill>
+                <a:latin typeface="Times New Roman" panose="02020503050405090304" pitchFamily="18" charset="0"/>
+                <a:cs typeface="Times New Roman" panose="02020503050405090304" pitchFamily="18" charset="0"/>
+              </a:rPr>
+              <a:t>CharacterFeature0</a:t>
+            </a:r>
+            <a:endParaRPr lang="en-US" altLang="zh-CN" sz="1400" b="1">
+              <a:solidFill>
+                <a:schemeClr val="tx1"/>
+              </a:solidFill>
+              <a:latin typeface="Times New Roman" panose="02020503050405090304" pitchFamily="18" charset="0"/>
+              <a:cs typeface="Times New Roman" panose="02020503050405090304" pitchFamily="18" charset="0"/>
+            </a:endParaRPr>
+          </a:p>
+        </p:txBody>
+      </p:sp>
+      <p:sp>
+        <p:nvSpPr>
+          <p:cNvPr id="6" name="文本框 5"/>
+          <p:cNvSpPr txBox="1"/>
+          <p:nvPr/>
+        </p:nvSpPr>
+        <p:spPr>
+          <a:xfrm>
+            <a:off x="3483610" y="2526665"/>
+            <a:ext cx="427355" cy="368300"/>
+          </a:xfrm>
+          <a:prstGeom prst="rect">
+            <a:avLst/>
+          </a:prstGeom>
+          <a:noFill/>
+        </p:spPr>
+        <p:txBody>
+          <a:bodyPr wrap="square" rtlCol="0">
+            <a:spAutoFit/>
+          </a:bodyPr>
+          <a:p>
+            <a:r>
+              <a:rPr lang="en-US" altLang="zh-CN"/>
+              <a:t>α</a:t>
+            </a:r>
+            <a:endParaRPr lang="en-US" altLang="zh-CN"/>
+          </a:p>
+        </p:txBody>
+      </p:sp>
+      <p:sp>
+        <p:nvSpPr>
+          <p:cNvPr id="7" name="文本框 6"/>
+          <p:cNvSpPr txBox="1"/>
+          <p:nvPr/>
+        </p:nvSpPr>
+        <p:spPr>
+          <a:xfrm>
+            <a:off x="4469130" y="4231005"/>
+            <a:ext cx="427355" cy="368300"/>
+          </a:xfrm>
+          <a:prstGeom prst="rect">
+            <a:avLst/>
+          </a:prstGeom>
+          <a:noFill/>
+        </p:spPr>
+        <p:txBody>
+          <a:bodyPr wrap="square" rtlCol="0">
+            <a:spAutoFit/>
+          </a:bodyPr>
+          <a:p>
+            <a:r>
+              <a:rPr lang="en-US" altLang="zh-CN"/>
+              <a:t>β</a:t>
+            </a:r>
+            <a:endParaRPr lang="en-US" altLang="zh-CN"/>
+          </a:p>
+        </p:txBody>
+      </p:sp>
+      <p:sp>
+        <p:nvSpPr>
+          <p:cNvPr id="8" name="文本框 7"/>
+          <p:cNvSpPr txBox="1"/>
+          <p:nvPr/>
+        </p:nvSpPr>
+        <p:spPr>
+          <a:xfrm>
+            <a:off x="3086100" y="3418840"/>
+            <a:ext cx="1222375" cy="368300"/>
+          </a:xfrm>
+          <a:prstGeom prst="rect">
+            <a:avLst/>
+          </a:prstGeom>
+          <a:noFill/>
+        </p:spPr>
+        <p:txBody>
+          <a:bodyPr wrap="square" rtlCol="0">
+            <a:spAutoFit/>
+          </a:bodyPr>
+          <a:p>
+            <a:r>
+              <a:rPr lang="en-US" altLang="zh-CN"/>
+              <a:t>α+</a:t>
+            </a:r>
+            <a:r>
+              <a:rPr lang="en-US" altLang="zh-CN">
+                <a:sym typeface="+mn-ea"/>
+              </a:rPr>
+              <a:t>β=1</a:t>
+            </a:r>
+            <a:endParaRPr lang="en-US" altLang="zh-CN"/>
+          </a:p>
+        </p:txBody>
+      </p:sp>
+      <p:cxnSp>
+        <p:nvCxnSpPr>
+          <p:cNvPr id="9" name="直接箭头连接符 8"/>
+          <p:cNvCxnSpPr/>
+          <p:nvPr/>
+        </p:nvCxnSpPr>
+        <p:spPr>
+          <a:xfrm>
+            <a:off x="6019808" y="2895253"/>
+            <a:ext cx="443865" cy="0"/>
+          </a:xfrm>
+          <a:prstGeom prst="straightConnector1">
+            <a:avLst/>
+          </a:prstGeom>
+          <a:ln>
+            <a:tailEnd type="triangle"/>
+          </a:ln>
+        </p:spPr>
+        <p:style>
+          <a:lnRef idx="3">
+            <a:schemeClr val="dk1"/>
+          </a:lnRef>
+          <a:fillRef idx="0">
+            <a:schemeClr val="dk1"/>
+          </a:fillRef>
+          <a:effectRef idx="2">
+            <a:schemeClr val="dk1"/>
+          </a:effectRef>
+          <a:fontRef idx="minor">
+            <a:schemeClr val="tx1"/>
+          </a:fontRef>
+        </p:style>
+      </p:cxnSp>
+      <p:sp>
+        <p:nvSpPr>
+          <p:cNvPr id="10" name="流程图: 可选过程 9"/>
+          <p:cNvSpPr/>
+          <p:nvPr/>
+        </p:nvSpPr>
+        <p:spPr>
+          <a:xfrm>
+            <a:off x="6463665" y="2413000"/>
+            <a:ext cx="1123315" cy="963295"/>
+          </a:xfrm>
+          <a:prstGeom prst="flowChartAlternateProcess">
+            <a:avLst/>
+          </a:prstGeom>
+          <a:solidFill>
+            <a:schemeClr val="accent4">
+              <a:lumMod val="60000"/>
+              <a:lumOff val="40000"/>
+            </a:schemeClr>
+          </a:solidFill>
+        </p:spPr>
+        <p:style>
+          <a:lnRef idx="2">
+            <a:schemeClr val="accent1">
+              <a:shade val="15000"/>
+            </a:schemeClr>
+          </a:lnRef>
+          <a:fillRef idx="1">
+            <a:schemeClr val="accent1"/>
+          </a:fillRef>
+          <a:effectRef idx="0">
+            <a:schemeClr val="accent1"/>
+          </a:effectRef>
+          <a:fontRef idx="minor">
+            <a:schemeClr val="lt1"/>
+          </a:fontRef>
+        </p:style>
+        <p:txBody>
+          <a:bodyPr rtlCol="0" anchor="ctr"/>
+          <a:lstStyle/>
+          <a:p>
+            <a:pPr algn="ctr"/>
+            <a:r>
+              <a:rPr lang="en-US" altLang="zh-CN" sz="1400" b="1">
+                <a:solidFill>
+                  <a:schemeClr val="tx1"/>
+                </a:solidFill>
+                <a:latin typeface="Times New Roman" panose="02020503050405090304" pitchFamily="18" charset="0"/>
+                <a:cs typeface="Times New Roman" panose="02020503050405090304" pitchFamily="18" charset="0"/>
+              </a:rPr>
+              <a:t>MLP</a:t>
+            </a:r>
+            <a:endParaRPr lang="en-US" altLang="zh-CN" sz="1400" b="1">
+              <a:solidFill>
+                <a:schemeClr val="tx1"/>
+              </a:solidFill>
+              <a:latin typeface="Times New Roman" panose="02020503050405090304" pitchFamily="18" charset="0"/>
+              <a:cs typeface="Times New Roman" panose="02020503050405090304" pitchFamily="18" charset="0"/>
+            </a:endParaRPr>
+          </a:p>
+        </p:txBody>
+      </p:sp>
+      <p:cxnSp>
+        <p:nvCxnSpPr>
+          <p:cNvPr id="11" name="直接箭头连接符 10"/>
+          <p:cNvCxnSpPr/>
+          <p:nvPr/>
+        </p:nvCxnSpPr>
+        <p:spPr>
+          <a:xfrm>
+            <a:off x="7586988" y="2895253"/>
+            <a:ext cx="443865" cy="0"/>
+          </a:xfrm>
+          <a:prstGeom prst="straightConnector1">
+            <a:avLst/>
+          </a:prstGeom>
+          <a:ln>
+            <a:tailEnd type="triangle"/>
+          </a:ln>
+        </p:spPr>
+        <p:style>
+          <a:lnRef idx="3">
+            <a:schemeClr val="dk1"/>
+          </a:lnRef>
+          <a:fillRef idx="0">
+            <a:schemeClr val="dk1"/>
+          </a:fillRef>
+          <a:effectRef idx="2">
+            <a:schemeClr val="dk1"/>
+          </a:effectRef>
+          <a:fontRef idx="minor">
+            <a:schemeClr val="tx1"/>
+          </a:fontRef>
+        </p:style>
+      </p:cxnSp>
+      <p:sp>
+        <p:nvSpPr>
+          <p:cNvPr id="13" name="流程图: 可选过程 12"/>
+          <p:cNvSpPr/>
+          <p:nvPr/>
+        </p:nvSpPr>
+        <p:spPr>
+          <a:xfrm>
+            <a:off x="8031480" y="2413000"/>
+            <a:ext cx="1123315" cy="963295"/>
+          </a:xfrm>
+          <a:prstGeom prst="flowChartAlternateProcess">
+            <a:avLst/>
+          </a:prstGeom>
+          <a:solidFill>
+            <a:srgbClr val="C00000"/>
+          </a:solidFill>
+        </p:spPr>
+        <p:style>
+          <a:lnRef idx="2">
+            <a:schemeClr val="accent1">
+              <a:shade val="15000"/>
+            </a:schemeClr>
+          </a:lnRef>
+          <a:fillRef idx="1">
+            <a:schemeClr val="accent1"/>
+          </a:fillRef>
+          <a:effectRef idx="0">
+            <a:schemeClr val="accent1"/>
+          </a:effectRef>
+          <a:fontRef idx="minor">
+            <a:schemeClr val="lt1"/>
+          </a:fontRef>
+        </p:style>
+        <p:txBody>
+          <a:bodyPr rtlCol="0" anchor="ctr"/>
+          <a:lstStyle/>
+          <a:p>
+            <a:pPr algn="ctr"/>
+            <a:r>
+              <a:rPr lang="en-US" altLang="zh-CN" sz="1400" b="1">
+                <a:solidFill>
+                  <a:schemeClr val="tx1"/>
+                </a:solidFill>
+                <a:latin typeface="Times New Roman" panose="02020503050405090304" pitchFamily="18" charset="0"/>
+                <a:cs typeface="Times New Roman" panose="02020503050405090304" pitchFamily="18" charset="0"/>
+              </a:rPr>
+              <a:t>Character</a:t>
+            </a:r>
+            <a:endParaRPr lang="en-US" altLang="zh-CN" sz="1400" b="1">
+              <a:solidFill>
+                <a:schemeClr val="tx1"/>
+              </a:solidFill>
+              <a:latin typeface="Times New Roman" panose="02020503050405090304" pitchFamily="18" charset="0"/>
+              <a:cs typeface="Times New Roman" panose="02020503050405090304" pitchFamily="18" charset="0"/>
+            </a:endParaRPr>
+          </a:p>
+          <a:p>
+            <a:pPr algn="ctr"/>
+            <a:r>
+              <a:rPr lang="en-US" altLang="zh-CN" sz="1400" b="1">
+                <a:solidFill>
+                  <a:schemeClr val="tx1"/>
+                </a:solidFill>
+                <a:latin typeface="Times New Roman" panose="02020503050405090304" pitchFamily="18" charset="0"/>
+                <a:cs typeface="Times New Roman" panose="02020503050405090304" pitchFamily="18" charset="0"/>
+              </a:rPr>
+              <a:t>Feature1</a:t>
+            </a:r>
+            <a:endParaRPr lang="en-US" altLang="zh-CN" sz="1400" b="1">
+              <a:solidFill>
+                <a:schemeClr val="tx1"/>
+              </a:solidFill>
+              <a:latin typeface="Times New Roman" panose="02020503050405090304" pitchFamily="18" charset="0"/>
+              <a:cs typeface="Times New Roman" panose="02020503050405090304" pitchFamily="18" charset="0"/>
+            </a:endParaRPr>
+          </a:p>
+          <a:p>
+            <a:pPr algn="ctr"/>
+            <a:endParaRPr lang="en-US" altLang="zh-CN" sz="1400" b="1">
+              <a:solidFill>
+                <a:schemeClr val="tx1"/>
+              </a:solidFill>
+              <a:latin typeface="Times New Roman" panose="02020503050405090304" pitchFamily="18" charset="0"/>
+              <a:cs typeface="Times New Roman" panose="02020503050405090304" pitchFamily="18" charset="0"/>
+            </a:endParaRPr>
+          </a:p>
+        </p:txBody>
+      </p:sp>
+      <p:cxnSp>
+        <p:nvCxnSpPr>
+          <p:cNvPr id="14" name="直接箭头连接符 13"/>
+          <p:cNvCxnSpPr/>
+          <p:nvPr/>
+        </p:nvCxnSpPr>
+        <p:spPr>
+          <a:xfrm flipV="1">
+            <a:off x="8593368" y="3376338"/>
+            <a:ext cx="0" cy="1180465"/>
+          </a:xfrm>
+          <a:prstGeom prst="straightConnector1">
+            <a:avLst/>
+          </a:prstGeom>
+          <a:ln>
+            <a:tailEnd type="triangle"/>
+          </a:ln>
+        </p:spPr>
+        <p:style>
+          <a:lnRef idx="3">
+            <a:schemeClr val="accent1"/>
+          </a:lnRef>
+          <a:fillRef idx="0">
+            <a:schemeClr val="accent1"/>
+          </a:fillRef>
+          <a:effectRef idx="2">
+            <a:schemeClr val="accent1"/>
+          </a:effectRef>
+          <a:fontRef idx="minor">
+            <a:schemeClr val="tx1"/>
+          </a:fontRef>
+        </p:style>
+      </p:cxnSp>
+      <p:sp>
+        <p:nvSpPr>
+          <p:cNvPr id="15" name="文本框 14"/>
+          <p:cNvSpPr txBox="1"/>
+          <p:nvPr/>
+        </p:nvSpPr>
+        <p:spPr>
+          <a:xfrm>
+            <a:off x="8593455" y="3787140"/>
+            <a:ext cx="2107565" cy="368300"/>
+          </a:xfrm>
+          <a:prstGeom prst="rect">
+            <a:avLst/>
+          </a:prstGeom>
+          <a:noFill/>
+        </p:spPr>
+        <p:txBody>
+          <a:bodyPr wrap="square" rtlCol="0">
+            <a:spAutoFit/>
+          </a:bodyPr>
+          <a:p>
+            <a:r>
+              <a:rPr lang="en-US" altLang="zh-CN"/>
+              <a:t>Position Embeddings</a:t>
+            </a:r>
+            <a:endParaRPr lang="en-US" altLang="zh-CN"/>
+          </a:p>
+        </p:txBody>
+      </p:sp>
+      <p:cxnSp>
+        <p:nvCxnSpPr>
+          <p:cNvPr id="16" name="直接箭头连接符 15"/>
+          <p:cNvCxnSpPr/>
+          <p:nvPr/>
+        </p:nvCxnSpPr>
+        <p:spPr>
+          <a:xfrm>
+            <a:off x="9154803" y="2895253"/>
+            <a:ext cx="537210" cy="0"/>
+          </a:xfrm>
+          <a:prstGeom prst="straightConnector1">
+            <a:avLst/>
+          </a:prstGeom>
+          <a:ln>
+            <a:tailEnd type="triangle"/>
+          </a:ln>
+        </p:spPr>
+        <p:style>
+          <a:lnRef idx="3">
+            <a:schemeClr val="dk1"/>
+          </a:lnRef>
+          <a:fillRef idx="0">
+            <a:schemeClr val="dk1"/>
+          </a:fillRef>
+          <a:effectRef idx="2">
+            <a:schemeClr val="dk1"/>
+          </a:effectRef>
+          <a:fontRef idx="minor">
+            <a:schemeClr val="tx1"/>
+          </a:fontRef>
+        </p:style>
+      </p:cxnSp>
+      <p:sp>
+        <p:nvSpPr>
+          <p:cNvPr id="52" name="流程图: 可选过程 51"/>
+          <p:cNvSpPr/>
+          <p:nvPr/>
+        </p:nvSpPr>
+        <p:spPr>
+          <a:xfrm>
+            <a:off x="9691788" y="2526948"/>
+            <a:ext cx="1343415" cy="670142"/>
+          </a:xfrm>
+          <a:prstGeom prst="flowChartAlternateProcess">
+            <a:avLst/>
+          </a:prstGeom>
+          <a:solidFill>
+            <a:schemeClr val="accent2"/>
+          </a:solidFill>
+        </p:spPr>
+        <p:style>
+          <a:lnRef idx="2">
+            <a:schemeClr val="accent1">
+              <a:shade val="15000"/>
+            </a:schemeClr>
+          </a:lnRef>
+          <a:fillRef idx="1">
+            <a:schemeClr val="accent1"/>
+          </a:fillRef>
+          <a:effectRef idx="0">
+            <a:schemeClr val="accent1"/>
+          </a:effectRef>
+          <a:fontRef idx="minor">
+            <a:schemeClr val="lt1"/>
+          </a:fontRef>
+        </p:style>
+        <p:txBody>
+          <a:bodyPr rtlCol="0" anchor="ctr"/>
+          <a:lstStyle/>
+          <a:p>
+            <a:pPr algn="ctr"/>
+            <a:r>
+              <a:rPr lang="en-US" altLang="zh-CN" b="1">
+                <a:solidFill>
+                  <a:schemeClr val="tx1"/>
+                </a:solidFill>
+                <a:latin typeface="Times New Roman" panose="02020503050405090304" pitchFamily="18" charset="0"/>
+                <a:cs typeface="Times New Roman" panose="02020503050405090304" pitchFamily="18" charset="0"/>
+              </a:rPr>
+              <a:t>Attention Layer</a:t>
+            </a:r>
+            <a:endParaRPr lang="zh-CN" altLang="en-US" b="1">
+              <a:solidFill>
+                <a:schemeClr val="tx1"/>
+              </a:solidFill>
+              <a:latin typeface="Times New Roman" panose="02020503050405090304" pitchFamily="18" charset="0"/>
+              <a:cs typeface="Times New Roman" panose="02020503050405090304" pitchFamily="18" charset="0"/>
+            </a:endParaRPr>
+          </a:p>
+        </p:txBody>
+      </p:sp>
+      <p:sp>
+        <p:nvSpPr>
+          <p:cNvPr id="28" name="流程图: 可选过程 27"/>
+          <p:cNvSpPr/>
+          <p:nvPr/>
+        </p:nvSpPr>
+        <p:spPr>
+          <a:xfrm>
+            <a:off x="756276" y="1284189"/>
+            <a:ext cx="1459281" cy="575023"/>
+          </a:xfrm>
+          <a:prstGeom prst="flowChartAlternateProcess">
+            <a:avLst/>
+          </a:prstGeom>
+          <a:solidFill>
+            <a:schemeClr val="accent4">
+              <a:lumMod val="60000"/>
+              <a:lumOff val="40000"/>
+            </a:schemeClr>
+          </a:solidFill>
+        </p:spPr>
+        <p:style>
+          <a:lnRef idx="2">
+            <a:schemeClr val="accent1">
+              <a:shade val="15000"/>
+            </a:schemeClr>
+          </a:lnRef>
+          <a:fillRef idx="1">
+            <a:schemeClr val="accent1"/>
+          </a:fillRef>
+          <a:effectRef idx="0">
+            <a:schemeClr val="accent1"/>
+          </a:effectRef>
+          <a:fontRef idx="minor">
+            <a:schemeClr val="lt1"/>
+          </a:fontRef>
+        </p:style>
+        <p:txBody>
+          <a:bodyPr rtlCol="0" anchor="ctr"/>
+          <a:lstStyle/>
+          <a:p>
+            <a:pPr algn="ctr"/>
+            <a:r>
+              <a:rPr lang="en-US" altLang="zh-CN" sz="1400" b="1" err="1">
+                <a:solidFill>
+                  <a:schemeClr val="tx1"/>
+                </a:solidFill>
+                <a:latin typeface="Times New Roman" panose="02020503050405090304" pitchFamily="18" charset="0"/>
+                <a:cs typeface="Times New Roman" panose="02020503050405090304" pitchFamily="18" charset="0"/>
+              </a:rPr>
+              <a:t>IDS_Tokenizer</a:t>
+            </a:r>
+            <a:endParaRPr lang="zh-CN" altLang="en-US" sz="1400" b="1">
+              <a:solidFill>
+                <a:schemeClr val="tx1"/>
+              </a:solidFill>
+              <a:latin typeface="Times New Roman" panose="02020503050405090304" pitchFamily="18" charset="0"/>
+              <a:cs typeface="Times New Roman" panose="02020503050405090304" pitchFamily="18" charset="0"/>
+            </a:endParaRPr>
+          </a:p>
+        </p:txBody>
+      </p:sp>
+      <p:cxnSp>
+        <p:nvCxnSpPr>
+          <p:cNvPr id="18" name="直接箭头连接符 17"/>
+          <p:cNvCxnSpPr/>
+          <p:nvPr/>
+        </p:nvCxnSpPr>
+        <p:spPr>
+          <a:xfrm>
+            <a:off x="1485908" y="1859568"/>
+            <a:ext cx="0" cy="730250"/>
+          </a:xfrm>
+          <a:prstGeom prst="straightConnector1">
+            <a:avLst/>
+          </a:prstGeom>
+          <a:ln>
+            <a:tailEnd type="triangle"/>
+          </a:ln>
+        </p:spPr>
+        <p:style>
+          <a:lnRef idx="3">
+            <a:schemeClr val="dk1"/>
+          </a:lnRef>
+          <a:fillRef idx="0">
+            <a:schemeClr val="dk1"/>
+          </a:fillRef>
+          <a:effectRef idx="2">
+            <a:schemeClr val="dk1"/>
+          </a:effectRef>
+          <a:fontRef idx="minor">
+            <a:schemeClr val="tx1"/>
+          </a:fontRef>
+        </p:style>
+      </p:cxnSp>
+      <p:sp>
+        <p:nvSpPr>
+          <p:cNvPr id="19" name="文本框 18"/>
+          <p:cNvSpPr txBox="1"/>
+          <p:nvPr/>
+        </p:nvSpPr>
+        <p:spPr>
+          <a:xfrm>
+            <a:off x="4504690" y="528955"/>
+            <a:ext cx="4064000" cy="583565"/>
+          </a:xfrm>
+          <a:prstGeom prst="rect">
+            <a:avLst/>
+          </a:prstGeom>
+          <a:noFill/>
+        </p:spPr>
+        <p:txBody>
+          <a:bodyPr wrap="square" rtlCol="0">
+            <a:spAutoFit/>
+          </a:bodyPr>
+          <a:p>
+            <a:r>
+              <a:rPr lang="en-US" altLang="zh-CN" sz="3200" b="1">
+                <a:latin typeface="+mj-lt"/>
+                <a:cs typeface="+mj-lt"/>
+              </a:rPr>
+              <a:t>In IDS_Embedder</a:t>
+            </a:r>
+            <a:endParaRPr lang="en-US" altLang="zh-CN" sz="3200" b="1">
+              <a:latin typeface="+mj-lt"/>
+              <a:cs typeface="+mj-lt"/>
+            </a:endParaRPr>
+          </a:p>
+        </p:txBody>
+      </p:sp>
+    </p:spTree>
   </p:cSld>
   <p:clrMapOvr>
     <a:masterClrMapping/>
@@ -4659,7 +5057,7 @@
     </a:clrScheme>
     <a:fontScheme name="Office">
       <a:majorFont>
-        <a:latin typeface="等线 Light" panose="020F0302020204030204"/>
+        <a:latin typeface="等线 Light"/>
         <a:ea typeface=""/>
         <a:cs typeface=""/>
         <a:font script="Jpan" typeface="游ゴシック Light"/>
@@ -4692,26 +5090,9 @@
         <a:font script="Viet" typeface="Times New Roman"/>
         <a:font script="Uigh" typeface="Microsoft Uighur"/>
         <a:font script="Geor" typeface="Sylfaen"/>
-        <a:font script="Armn" typeface="Arial"/>
-        <a:font script="Bugi" typeface="Leelawadee UI"/>
-        <a:font script="Bopo" typeface="Microsoft JhengHei"/>
-        <a:font script="Java" typeface="Javanese Text"/>
-        <a:font script="Lisu" typeface="Segoe UI"/>
-        <a:font script="Mymr" typeface="Myanmar Text"/>
-        <a:font script="Nkoo" typeface="Ebrima"/>
-        <a:font script="Olck" typeface="Nirmala UI"/>
-        <a:font script="Osma" typeface="Ebrima"/>
-        <a:font script="Phag" typeface="Phagspa"/>
-        <a:font script="Syrn" typeface="Estrangelo Edessa"/>
-        <a:font script="Syrj" typeface="Estrangelo Edessa"/>
-        <a:font script="Syre" typeface="Estrangelo Edessa"/>
-        <a:font script="Sora" typeface="Nirmala UI"/>
-        <a:font script="Tale" typeface="Microsoft Tai Le"/>
-        <a:font script="Talu" typeface="Microsoft New Tai Lue"/>
-        <a:font script="Tfng" typeface="Ebrima"/>
       </a:majorFont>
       <a:minorFont>
-        <a:latin typeface="等线" panose="020F0502020204030204"/>
+        <a:latin typeface="等线"/>
         <a:ea typeface=""/>
         <a:cs typeface=""/>
         <a:font script="Jpan" typeface="游ゴシック"/>
@@ -4744,23 +5125,6 @@
         <a:font script="Viet" typeface="Arial"/>
         <a:font script="Uigh" typeface="Microsoft Uighur"/>
         <a:font script="Geor" typeface="Sylfaen"/>
-        <a:font script="Armn" typeface="Arial"/>
-        <a:font script="Bugi" typeface="Leelawadee UI"/>
-        <a:font script="Bopo" typeface="Microsoft JhengHei"/>
-        <a:font script="Java" typeface="Javanese Text"/>
-        <a:font script="Lisu" typeface="Segoe UI"/>
-        <a:font script="Mymr" typeface="Myanmar Text"/>
-        <a:font script="Nkoo" typeface="Ebrima"/>
-        <a:font script="Olck" typeface="Nirmala UI"/>
-        <a:font script="Osma" typeface="Ebrima"/>
-        <a:font script="Phag" typeface="Phagspa"/>
-        <a:font script="Syrn" typeface="Estrangelo Edessa"/>
-        <a:font script="Syrj" typeface="Estrangelo Edessa"/>
-        <a:font script="Syre" typeface="Estrangelo Edessa"/>
-        <a:font script="Sora" typeface="Nirmala UI"/>
-        <a:font script="Tale" typeface="Microsoft Tai Le"/>
-        <a:font script="Talu" typeface="Microsoft New Tai Lue"/>
-        <a:font script="Tfng" typeface="Ebrima"/>
       </a:minorFont>
     </a:fontScheme>
     <a:fmtScheme name="Office">
@@ -4901,8 +5265,6 @@
       </a:bgFillStyleLst>
     </a:fmtScheme>
   </a:themeElements>
-  <a:objectDefaults/>
-  <a:extraClrSchemeLst/>
   <a:extLst>
     <a:ext uri="{05A4C25C-085E-4340-85A3-A5531E510DB2}">
       <thm15:themeFamily xmlns:thm15="http://schemas.microsoft.com/office/thememl/2012/main" name="Office Theme" id="{62F939B6-93AF-4DB8-9C6B-D6C7DFDC589F}" vid="{4A3C46E8-61CC-4603-A589-7422A47A8E4A}"/>
